--- a/templates/decks/zh/michael-jackson-king-of-pop/template.pptx
+++ b/templates/decks/zh/michael-jackson-king-of-pop/template.pptx
@@ -3145,30 +3145,60 @@
           </a:p>
         </p:txBody>
       </p:sp>
-      <p:sp>
-        <p:nvSpPr>
-          <p:cNvPr id="3" name="Isosceles Triangle 2"/>
+      <p:pic>
+        <p:nvPicPr>
+          <p:cNvPr id="3" name="Picture 2" descr="" title=""/>
+          <p:cNvPicPr>
+            <a:picLocks noChangeAspect="1"/>
+          </p:cNvPicPr>
+          <p:nvPr/>
+        </p:nvPicPr>
+        <p:blipFill>
+          <a:blip r:embed="rId2"/>
+          <a:srcRect t="7812" b="7812"/>
+          <a:stretch>
+            <a:fillRect/>
+          </a:stretch>
+        </p:blipFill>
+        <p:spPr>
+          <a:xfrm>
+            <a:off x="0" y="0"/>
+            <a:ext cx="9144000" cy="5143500"/>
+          </a:xfrm>
+          <a:prstGeom prst="rect">
+            <a:avLst/>
+          </a:prstGeom>
+        </p:spPr>
+      </p:pic>
+      <p:sp>
+        <p:nvSpPr>
+          <p:cNvPr id="4" name="Rectangle 3"/>
           <p:cNvSpPr/>
           <p:nvPr/>
         </p:nvSpPr>
         <p:spPr>
           <a:xfrm>
-            <a:off x="2377440" y="0"/>
-            <a:ext cx="4389120" cy="5074920"/>
-          </a:xfrm>
-          <a:prstGeom prst="triangle">
+            <a:off x="0" y="0"/>
+            <a:ext cx="9144000" cy="5143500"/>
+          </a:xfrm>
+          <a:prstGeom prst="rect">
             <a:avLst/>
           </a:prstGeom>
           <a:gradFill>
             <a:gsLst>
               <a:gs pos="0">
-                <a:srgbClr val="E8B23A">
-                  <a:alpha val="17000"/>
+                <a:srgbClr val="000000">
+                  <a:alpha val="40000"/>
+                </a:srgbClr>
+              </a:gs>
+              <a:gs pos="52000">
+                <a:srgbClr val="000000">
+                  <a:alpha val="50000"/>
                 </a:srgbClr>
               </a:gs>
               <a:gs pos="100000">
-                <a:srgbClr val="E8B23A">
-                  <a:alpha val="0"/>
+                <a:srgbClr val="000000">
+                  <a:alpha val="52000"/>
                 </a:srgbClr>
               </a:gs>
             </a:gsLst>
@@ -3203,239 +3233,7 @@
       </p:sp>
       <p:sp>
         <p:nvSpPr>
-          <p:cNvPr id="4" name="Oval 3"/>
-          <p:cNvSpPr/>
-          <p:nvPr/>
-        </p:nvSpPr>
-        <p:spPr>
-          <a:xfrm>
-            <a:off x="2651760" y="0"/>
-            <a:ext cx="3840480" cy="2286000"/>
-          </a:xfrm>
-          <a:prstGeom prst="ellipse">
-            <a:avLst/>
-          </a:prstGeom>
-          <a:gradFill>
-            <a:gsLst>
-              <a:gs pos="0">
-                <a:srgbClr val="E8B23A">
-                  <a:alpha val="15000"/>
-                </a:srgbClr>
-              </a:gs>
-              <a:gs pos="100000">
-                <a:srgbClr val="E8B23A">
-                  <a:alpha val="0"/>
-                </a:srgbClr>
-              </a:gs>
-            </a:gsLst>
-            <a:path path="circle">
-              <a:fillToRect l="50000" t="50000" r="50000" b="50000"/>
-            </a:path>
-          </a:gradFill>
-          <a:ln>
-            <a:noFill/>
-          </a:ln>
-          <a:effectLst/>
-        </p:spPr>
-        <p:style>
-          <a:lnRef idx="1">
-            <a:schemeClr val="accent1"/>
-          </a:lnRef>
-          <a:fillRef idx="3">
-            <a:schemeClr val="accent1"/>
-          </a:fillRef>
-          <a:effectRef idx="2">
-            <a:schemeClr val="accent1"/>
-          </a:effectRef>
-          <a:fontRef idx="minor">
-            <a:schemeClr val="lt1"/>
-          </a:fontRef>
-        </p:style>
-        <p:txBody>
-          <a:bodyPr rtlCol="0" anchor="ctr"/>
-          <a:lstStyle/>
-          <a:p>
-            <a:pPr algn="ctr"/>
-          </a:p>
-        </p:txBody>
-      </p:sp>
-      <p:sp>
-        <p:nvSpPr>
-          <p:cNvPr id="5" name="Oval 4"/>
-          <p:cNvSpPr/>
-          <p:nvPr/>
-        </p:nvSpPr>
-        <p:spPr>
-          <a:xfrm>
-            <a:off x="3520440" y="0"/>
-            <a:ext cx="2103120" cy="1737360"/>
-          </a:xfrm>
-          <a:prstGeom prst="ellipse">
-            <a:avLst/>
-          </a:prstGeom>
-          <a:gradFill>
-            <a:gsLst>
-              <a:gs pos="0">
-                <a:srgbClr val="E8B23A">
-                  <a:alpha val="44000"/>
-                </a:srgbClr>
-              </a:gs>
-              <a:gs pos="100000">
-                <a:srgbClr val="E8B23A">
-                  <a:alpha val="0"/>
-                </a:srgbClr>
-              </a:gs>
-            </a:gsLst>
-            <a:path path="circle">
-              <a:fillToRect l="50000" t="50000" r="50000" b="50000"/>
-            </a:path>
-          </a:gradFill>
-          <a:ln>
-            <a:noFill/>
-          </a:ln>
-          <a:effectLst/>
-        </p:spPr>
-        <p:style>
-          <a:lnRef idx="1">
-            <a:schemeClr val="accent1"/>
-          </a:lnRef>
-          <a:fillRef idx="3">
-            <a:schemeClr val="accent1"/>
-          </a:fillRef>
-          <a:effectRef idx="2">
-            <a:schemeClr val="accent1"/>
-          </a:effectRef>
-          <a:fontRef idx="minor">
-            <a:schemeClr val="lt1"/>
-          </a:fontRef>
-        </p:style>
-        <p:txBody>
-          <a:bodyPr rtlCol="0" anchor="ctr"/>
-          <a:lstStyle/>
-          <a:p>
-            <a:pPr algn="ctr"/>
-          </a:p>
-        </p:txBody>
-      </p:sp>
-      <p:sp>
-        <p:nvSpPr>
-          <p:cNvPr id="6" name="Oval 5"/>
-          <p:cNvSpPr/>
-          <p:nvPr/>
-        </p:nvSpPr>
-        <p:spPr>
-          <a:xfrm>
-            <a:off x="731519" y="91439"/>
-            <a:ext cx="7680960" cy="4937760"/>
-          </a:xfrm>
-          <a:prstGeom prst="ellipse">
-            <a:avLst/>
-          </a:prstGeom>
-          <a:gradFill>
-            <a:gsLst>
-              <a:gs pos="0">
-                <a:srgbClr val="E8B23A">
-                  <a:alpha val="10000"/>
-                </a:srgbClr>
-              </a:gs>
-              <a:gs pos="100000">
-                <a:srgbClr val="E8B23A">
-                  <a:alpha val="0"/>
-                </a:srgbClr>
-              </a:gs>
-            </a:gsLst>
-            <a:path path="circle">
-              <a:fillToRect l="50000" t="50000" r="50000" b="50000"/>
-            </a:path>
-          </a:gradFill>
-          <a:ln>
-            <a:noFill/>
-          </a:ln>
-          <a:effectLst/>
-        </p:spPr>
-        <p:style>
-          <a:lnRef idx="1">
-            <a:schemeClr val="accent1"/>
-          </a:lnRef>
-          <a:fillRef idx="3">
-            <a:schemeClr val="accent1"/>
-          </a:fillRef>
-          <a:effectRef idx="2">
-            <a:schemeClr val="accent1"/>
-          </a:effectRef>
-          <a:fontRef idx="minor">
-            <a:schemeClr val="lt1"/>
-          </a:fontRef>
-        </p:style>
-        <p:txBody>
-          <a:bodyPr rtlCol="0" anchor="ctr"/>
-          <a:lstStyle/>
-          <a:p>
-            <a:pPr algn="ctr"/>
-          </a:p>
-        </p:txBody>
-      </p:sp>
-      <p:sp>
-        <p:nvSpPr>
-          <p:cNvPr id="7" name="Oval 6"/>
-          <p:cNvSpPr/>
-          <p:nvPr/>
-        </p:nvSpPr>
-        <p:spPr>
-          <a:xfrm>
-            <a:off x="1645919" y="3749039"/>
-            <a:ext cx="5852160" cy="1371600"/>
-          </a:xfrm>
-          <a:prstGeom prst="ellipse">
-            <a:avLst/>
-          </a:prstGeom>
-          <a:gradFill>
-            <a:gsLst>
-              <a:gs pos="0">
-                <a:srgbClr val="E8B23A">
-                  <a:alpha val="20000"/>
-                </a:srgbClr>
-              </a:gs>
-              <a:gs pos="100000">
-                <a:srgbClr val="E8B23A">
-                  <a:alpha val="0"/>
-                </a:srgbClr>
-              </a:gs>
-            </a:gsLst>
-            <a:path path="circle">
-              <a:fillToRect l="50000" t="50000" r="50000" b="50000"/>
-            </a:path>
-          </a:gradFill>
-          <a:ln>
-            <a:noFill/>
-          </a:ln>
-          <a:effectLst/>
-        </p:spPr>
-        <p:style>
-          <a:lnRef idx="1">
-            <a:schemeClr val="accent1"/>
-          </a:lnRef>
-          <a:fillRef idx="3">
-            <a:schemeClr val="accent1"/>
-          </a:fillRef>
-          <a:effectRef idx="2">
-            <a:schemeClr val="accent1"/>
-          </a:effectRef>
-          <a:fontRef idx="minor">
-            <a:schemeClr val="lt1"/>
-          </a:fontRef>
-        </p:style>
-        <p:txBody>
-          <a:bodyPr rtlCol="0" anchor="ctr"/>
-          <a:lstStyle/>
-          <a:p>
-            <a:pPr algn="ctr"/>
-          </a:p>
-        </p:txBody>
-      </p:sp>
-      <p:sp>
-        <p:nvSpPr>
-          <p:cNvPr id="8" name="Rectangle 7"/>
+          <p:cNvPr id="5" name="Rectangle 4"/>
           <p:cNvSpPr/>
           <p:nvPr/>
         </p:nvSpPr>
@@ -3491,7 +3289,7 @@
       </p:sp>
       <p:sp>
         <p:nvSpPr>
-          <p:cNvPr id="9" name="TextBox 8"/>
+          <p:cNvPr id="6" name="TextBox 5"/>
           <p:cNvSpPr txBox="1"/>
           <p:nvPr/>
         </p:nvSpPr>
@@ -3529,7 +3327,7 @@
                   <a:srgbClr val="E8B23A"/>
                 </a:solidFill>
                 <a:latin typeface="Helvetica Neue"/>
-                <a:ea typeface="PingFang SC"/>
+                <a:ea typeface="Hiragino Sans GB"/>
               </a:rPr>
               <a:t>生 涯 回 顾</a:t>
             </a:r>
@@ -3538,7 +3336,7 @@
       </p:sp>
       <p:sp>
         <p:nvSpPr>
-          <p:cNvPr id="10" name="TextBox 9"/>
+          <p:cNvPr id="7" name="TextBox 6"/>
           <p:cNvSpPr txBox="1"/>
           <p:nvPr/>
         </p:nvSpPr>
@@ -3546,53 +3344,6 @@
           <a:xfrm>
             <a:off x="640080" y="1517904"/>
             <a:ext cx="7863840" cy="1051560"/>
-          </a:xfrm>
-          <a:prstGeom prst="rect">
-            <a:avLst/>
-          </a:prstGeom>
-          <a:noFill/>
-          <a:ln/>
-        </p:spPr>
-        <p:txBody>
-          <a:bodyPr wrap="square" anchor="t" lIns="25400" rIns="25400" tIns="25400" bIns="25400">
-            <a:spAutoFit/>
-          </a:bodyPr>
-          <a:lstStyle/>
-          <a:p>
-            <a:pPr algn="ctr">
-              <a:lnSpc>
-                <a:spcPct val="100000"/>
-              </a:lnSpc>
-              <a:spcBef>
-                <a:spcPts val="0"/>
-              </a:spcBef>
-              <a:spcAft>
-                <a:spcPts val="0"/>
-              </a:spcAft>
-            </a:pPr>
-            <a:r>
-              <a:rPr sz="6200" b="0" i="0">
-                <a:solidFill>
-                  <a:srgbClr val="F3EFE6"/>
-                </a:solidFill>
-                <a:latin typeface="Didot"/>
-                <a:ea typeface="PingFang SC"/>
-              </a:rPr>
-              <a:t>Michael Jackson</a:t>
-            </a:r>
-          </a:p>
-        </p:txBody>
-      </p:sp>
-      <p:sp>
-        <p:nvSpPr>
-          <p:cNvPr id="11" name="TextBox 10"/>
-          <p:cNvSpPr txBox="1"/>
-          <p:nvPr/>
-        </p:nvSpPr>
-        <p:spPr>
-          <a:xfrm>
-            <a:off x="640080" y="2615184"/>
-            <a:ext cx="7863840" cy="548640"/>
           </a:xfrm>
           <a:prstGeom prst="rect">
             <a:avLst/>
@@ -3618,21 +3369,68 @@
               </a:spcAft>
             </a:pPr>
             <a:r>
-              <a:rPr sz="3000" b="0" i="1">
+              <a:rPr sz="6200" b="0" i="0">
+                <a:solidFill>
+                  <a:srgbClr val="F3EFE6"/>
+                </a:solidFill>
+                <a:latin typeface="Didot"/>
+                <a:ea typeface="Hiragino Sans GB"/>
+              </a:rPr>
+              <a:t>迈克尔·杰克逊</a:t>
+            </a:r>
+          </a:p>
+        </p:txBody>
+      </p:sp>
+      <p:sp>
+        <p:nvSpPr>
+          <p:cNvPr id="8" name="TextBox 7"/>
+          <p:cNvSpPr txBox="1"/>
+          <p:nvPr/>
+        </p:nvSpPr>
+        <p:spPr>
+          <a:xfrm>
+            <a:off x="640080" y="2615184"/>
+            <a:ext cx="7863840" cy="548640"/>
+          </a:xfrm>
+          <a:prstGeom prst="rect">
+            <a:avLst/>
+          </a:prstGeom>
+          <a:noFill/>
+          <a:ln/>
+        </p:spPr>
+        <p:txBody>
+          <a:bodyPr wrap="square" anchor="t" lIns="25400" rIns="25400" tIns="25400" bIns="25400">
+            <a:spAutoFit/>
+          </a:bodyPr>
+          <a:lstStyle/>
+          <a:p>
+            <a:pPr algn="ctr">
+              <a:lnSpc>
+                <a:spcPct val="112000"/>
+              </a:lnSpc>
+              <a:spcBef>
+                <a:spcPts val="0"/>
+              </a:spcBef>
+              <a:spcAft>
+                <a:spcPts val="0"/>
+              </a:spcAft>
+            </a:pPr>
+            <a:r>
+              <a:rPr sz="3000" b="0" i="0">
                 <a:solidFill>
                   <a:srgbClr val="E8B23A"/>
                 </a:solidFill>
                 <a:latin typeface="Didot"/>
-                <a:ea typeface="PingFang SC"/>
+                <a:ea typeface="Hiragino Sans GB"/>
               </a:rPr>
-              <a:t>流行乐之王</a:t>
-            </a:r>
-          </a:p>
-        </p:txBody>
-      </p:sp>
-      <p:sp>
-        <p:nvSpPr>
-          <p:cNvPr id="12" name="Rectangle 11"/>
+              <a:t>流行音乐之王</a:t>
+            </a:r>
+          </a:p>
+        </p:txBody>
+      </p:sp>
+      <p:sp>
+        <p:nvSpPr>
+          <p:cNvPr id="9" name="Rectangle 8"/>
           <p:cNvSpPr/>
           <p:nvPr/>
         </p:nvSpPr>
@@ -3676,7 +3474,7 @@
       </p:sp>
       <p:sp>
         <p:nvSpPr>
-          <p:cNvPr id="13" name="TextBox 12"/>
+          <p:cNvPr id="10" name="TextBox 9"/>
           <p:cNvSpPr txBox="1"/>
           <p:nvPr/>
         </p:nvSpPr>
@@ -3714,16 +3512,16 @@
                   <a:srgbClr val="CBC5D2"/>
                 </a:solidFill>
                 <a:latin typeface="Helvetica Neue"/>
-                <a:ea typeface="PingFang SC"/>
+                <a:ea typeface="Hiragino Sans GB"/>
               </a:rPr>
-              <a:t>从 Jackson 5 到全球偶像 —— 十四页，回顾一段传奇</a:t>
-            </a:r>
-          </a:p>
-        </p:txBody>
-      </p:sp>
-      <p:sp>
-        <p:nvSpPr>
-          <p:cNvPr id="14" name="TextBox 13"/>
+              <a:t>从 Jackson 5 到全球偶像 —— 十四页回顾一生</a:t>
+            </a:r>
+          </a:p>
+        </p:txBody>
+      </p:sp>
+      <p:sp>
+        <p:nvSpPr>
+          <p:cNvPr id="11" name="TextBox 10"/>
           <p:cNvSpPr txBox="1"/>
           <p:nvPr/>
         </p:nvSpPr>
@@ -3761,7 +3559,7 @@
                   <a:srgbClr val="958EA0"/>
                 </a:solidFill>
                 <a:latin typeface="Helvetica Neue"/>
-                <a:ea typeface="PingFang SC"/>
+                <a:ea typeface="Hiragino Sans GB"/>
               </a:rPr>
               <a:t>1958  —  2009</a:t>
             </a:r>
@@ -3770,7 +3568,7 @@
       </p:sp>
       <p:sp>
         <p:nvSpPr>
-          <p:cNvPr id="15" name="TextBox 14"/>
+          <p:cNvPr id="12" name="TextBox 11"/>
           <p:cNvSpPr txBox="1"/>
           <p:nvPr/>
         </p:nvSpPr>
@@ -3808,9 +3606,9 @@
                   <a:srgbClr val="958EA0"/>
                 </a:solidFill>
                 <a:latin typeface="Helvetica Neue"/>
-                <a:ea typeface="PingFang SC"/>
+                <a:ea typeface="Hiragino Sans GB"/>
               </a:rPr>
-              <a:t>示例 DECK  ·  由 SLIDE-MAKER 构建</a:t>
+              <a:t>示例模板  ·  SLIDE-MAKER 出品</a:t>
             </a:r>
           </a:p>
         </p:txBody>
@@ -3917,7 +3715,7 @@
                   <a:srgbClr val="E8B23A"/>
                 </a:solidFill>
                 <a:latin typeface="Helvetica Neue"/>
-                <a:ea typeface="PingFang SC"/>
+                <a:ea typeface="Hiragino Sans GB"/>
               </a:rPr>
               <a:t>影响</a:t>
             </a:r>
@@ -3964,7 +3762,7 @@
                   <a:srgbClr val="F3EFE6"/>
                 </a:solidFill>
                 <a:latin typeface="Didot"/>
-                <a:ea typeface="PingFang SC"/>
+                <a:ea typeface="Hiragino Sans GB"/>
               </a:rPr>
               <a:t>榜单之外</a:t>
             </a:r>
@@ -4055,7 +3853,7 @@
                   <a:srgbClr val="E8B23A"/>
                 </a:solidFill>
                 <a:latin typeface="Didot"/>
-                <a:ea typeface="PingFang SC"/>
+                <a:ea typeface="Hiragino Sans GB"/>
               </a:rPr>
               <a:t>MJ</a:t>
             </a:r>
@@ -4265,7 +4063,7 @@
                   <a:srgbClr val="F3EFE6"/>
                 </a:solidFill>
                 <a:latin typeface="Didot"/>
-                <a:ea typeface="PingFang SC"/>
+                <a:ea typeface="Hiragino Sans GB"/>
               </a:rPr>
               <a:t>打破壁垒</a:t>
             </a:r>
@@ -4312,9 +4110,9 @@
                   <a:srgbClr val="CBC5D2"/>
                 </a:solidFill>
                 <a:latin typeface="Helvetica Neue"/>
-                <a:ea typeface="PingFang SC"/>
+                <a:ea typeface="Hiragino Sans GB"/>
               </a:rPr>
-              <a:t>他是最早进入 MTV 高频轮播的黑人艺术家之一 —— 他的 MV 帮这个年轻的频道打破了肤色的壁垒。</a:t>
+              <a:t>他是最早在 MTV 高频轮播的黑人艺人之一 —— 他的录影带帮这个年轻的频道打破了肤色的隔阂。</a:t>
             </a:r>
           </a:p>
         </p:txBody>
@@ -4522,7 +4320,7 @@
                   <a:srgbClr val="F3EFE6"/>
                 </a:solidFill>
                 <a:latin typeface="Didot"/>
-                <a:ea typeface="PingFang SC"/>
+                <a:ea typeface="Hiragino Sans GB"/>
               </a:rPr>
               <a:t>人道主义</a:t>
             </a:r>
@@ -4569,9 +4367,9 @@
                   <a:srgbClr val="CBC5D2"/>
                 </a:solidFill>
                 <a:latin typeface="Helvetica Neue"/>
-                <a:ea typeface="PingFang SC"/>
+                <a:ea typeface="Hiragino Sans GB"/>
               </a:rPr>
-              <a:t>与 Lionel Richie 合写《We Are the World》（1985）；这支 USA for Africa 单曲为饥荒救援筹得数千万美元。</a:t>
+              <a:t>与莱昂纳尔·里奇合写《We Are the World》（1985）；这支 USA for Africa 单曲为饥荒救济筹得数千万美元。</a:t>
             </a:r>
           </a:p>
         </p:txBody>
@@ -4779,9 +4577,9 @@
                   <a:srgbClr val="F3EFE6"/>
                 </a:solidFill>
                 <a:latin typeface="Didot"/>
-                <a:ea typeface="PingFang SC"/>
+                <a:ea typeface="Hiragino Sans GB"/>
               </a:rPr>
-              <a:t>全球蓝本</a:t>
+              <a:t>全球范本</a:t>
             </a:r>
           </a:p>
         </p:txBody>
@@ -4826,9 +4624,9 @@
                   <a:srgbClr val="CBC5D2"/>
                 </a:solidFill>
                 <a:latin typeface="Helvetica Neue"/>
-                <a:ea typeface="PingFang SC"/>
+                <a:ea typeface="Hiragino Sans GB"/>
               </a:rPr>
-              <a:t>专辑时代、MV 时代、世界巡演 —— 他把它们熔铸成现代、跨越边界的流行巨星范式。</a:t>
+              <a:t>专辑时代、录影带时代、世界巡演 —— 他把三者揉成了现代跨界流行巨星的模板。</a:t>
             </a:r>
           </a:p>
         </p:txBody>
@@ -4917,9 +4715,9 @@
                   <a:srgbClr val="E8B23A"/>
                 </a:solidFill>
                 <a:latin typeface="Helvetica Neue"/>
-                <a:ea typeface="PingFang SC"/>
+                <a:ea typeface="Hiragino Sans GB"/>
               </a:rPr>
-              <a:t>MICHAEL JACKSON</a:t>
+              <a:t>迈克尔·杰克逊</a:t>
             </a:r>
             <a:r>
               <a:rPr sz="850" b="0" i="0">
@@ -4927,9 +4725,9 @@
                   <a:srgbClr val="958EA0"/>
                 </a:solidFill>
                 <a:latin typeface="Helvetica Neue"/>
-                <a:ea typeface="PingFang SC"/>
+                <a:ea typeface="Hiragino Sans GB"/>
               </a:rPr>
-              <a:t>   ·   流行乐之王</a:t>
+              <a:t>   ·   流行音乐之王</a:t>
             </a:r>
           </a:p>
         </p:txBody>
@@ -4974,7 +4772,7 @@
                   <a:srgbClr val="958EA0"/>
                 </a:solidFill>
                 <a:latin typeface="Helvetica Neue"/>
-                <a:ea typeface="PingFang SC"/>
+                <a:ea typeface="Hiragino Sans GB"/>
               </a:rPr>
               <a:t>10 / 14</a:t>
             </a:r>
@@ -5083,7 +4881,7 @@
                   <a:srgbClr val="E8B23A"/>
                 </a:solidFill>
                 <a:latin typeface="Helvetica Neue"/>
-                <a:ea typeface="PingFang SC"/>
+                <a:ea typeface="Hiragino Sans GB"/>
               </a:rPr>
               <a:t>荣誉</a:t>
             </a:r>
@@ -5130,9 +4928,9 @@
                   <a:srgbClr val="F3EFE6"/>
                 </a:solidFill>
                 <a:latin typeface="Didot"/>
-                <a:ea typeface="PingFang SC"/>
+                <a:ea typeface="Hiragino Sans GB"/>
               </a:rPr>
-              <a:t>流行史上获奖最多的生涯</a:t>
+              <a:t>流行史上荣誉最盛的生涯</a:t>
             </a:r>
           </a:p>
         </p:txBody>
@@ -5221,7 +5019,7 @@
                   <a:srgbClr val="E8B23A"/>
                 </a:solidFill>
                 <a:latin typeface="Didot"/>
-                <a:ea typeface="PingFang SC"/>
+                <a:ea typeface="Hiragino Sans GB"/>
               </a:rPr>
               <a:t>MJ</a:t>
             </a:r>
@@ -5314,7 +5112,7 @@
                   <a:srgbClr val="0E0D13"/>
                 </a:solidFill>
                 <a:latin typeface="Helvetica Neue"/>
-                <a:ea typeface="PingFang SC"/>
+                <a:ea typeface="Hiragino Sans GB"/>
               </a:rPr>
               <a:t>1984</a:t>
             </a:r>
@@ -5361,7 +5159,7 @@
                   <a:srgbClr val="F3EFE6"/>
                 </a:solidFill>
                 <a:latin typeface="Helvetica Neue"/>
-                <a:ea typeface="PingFang SC"/>
+                <a:ea typeface="Hiragino Sans GB"/>
               </a:rPr>
               <a:t>凭《Thriller》斩获八座格莱美 —— 创下当时的单夜纪录</a:t>
             </a:r>
@@ -5498,7 +5296,7 @@
                   <a:srgbClr val="0E0D13"/>
                 </a:solidFill>
                 <a:latin typeface="Helvetica Neue"/>
-                <a:ea typeface="PingFang SC"/>
+                <a:ea typeface="Hiragino Sans GB"/>
               </a:rPr>
               <a:t>1993</a:t>
             </a:r>
@@ -5545,7 +5343,7 @@
                   <a:srgbClr val="F3EFE6"/>
                 </a:solidFill>
                 <a:latin typeface="Helvetica Neue"/>
-                <a:ea typeface="PingFang SC"/>
+                <a:ea typeface="Hiragino Sans GB"/>
               </a:rPr>
               <a:t>格莱美传奇奖，于第 35 届格莱美颁出</a:t>
             </a:r>
@@ -5682,7 +5480,7 @@
                   <a:srgbClr val="0E0D13"/>
                 </a:solidFill>
                 <a:latin typeface="Helvetica Neue"/>
-                <a:ea typeface="PingFang SC"/>
+                <a:ea typeface="Hiragino Sans GB"/>
               </a:rPr>
               <a:t>1997</a:t>
             </a:r>
@@ -5729,9 +5527,9 @@
                   <a:srgbClr val="F3EFE6"/>
                 </a:solidFill>
                 <a:latin typeface="Helvetica Neue"/>
-                <a:ea typeface="PingFang SC"/>
+                <a:ea typeface="Hiragino Sans GB"/>
               </a:rPr>
-              <a:t>摇滚名人堂 —— 以 Jackson 5 成员身份入选</a:t>
+              <a:t>入选摇滚名人堂 —— 以 Jackson 5 成员身份</a:t>
             </a:r>
           </a:p>
         </p:txBody>
@@ -5866,7 +5664,7 @@
                   <a:srgbClr val="0E0D13"/>
                 </a:solidFill>
                 <a:latin typeface="Helvetica Neue"/>
-                <a:ea typeface="PingFang SC"/>
+                <a:ea typeface="Hiragino Sans GB"/>
               </a:rPr>
               <a:t>2001</a:t>
             </a:r>
@@ -5913,9 +5711,9 @@
                   <a:srgbClr val="F3EFE6"/>
                 </a:solidFill>
                 <a:latin typeface="Helvetica Neue"/>
-                <a:ea typeface="PingFang SC"/>
+                <a:ea typeface="Hiragino Sans GB"/>
               </a:rPr>
-              <a:t>摇滚名人堂 —— 以个人身份入选</a:t>
+              <a:t>入选摇滚名人堂 —— 以个人身份</a:t>
             </a:r>
           </a:p>
         </p:txBody>
@@ -6050,7 +5848,7 @@
                   <a:srgbClr val="E8B23A"/>
                 </a:solidFill>
                 <a:latin typeface="Helvetica Neue"/>
-                <a:ea typeface="PingFang SC"/>
+                <a:ea typeface="Hiragino Sans GB"/>
               </a:rPr>
               <a:t>生涯</a:t>
             </a:r>
@@ -6097,9 +5895,9 @@
                   <a:srgbClr val="E8B23A"/>
                 </a:solidFill>
                 <a:latin typeface="Helvetica Neue"/>
-                <a:ea typeface="PingFang SC"/>
+                <a:ea typeface="Hiragino Sans GB"/>
               </a:rPr>
-              <a:t>个人 13 支 Billboard Hot 100 冠军单曲 —— 含 Jackson 5 共 17 支</a:t>
+              <a:t>个人 13 支 Billboard Hot 100 冠军单曲 —— 连 Jackson 5 共 17 支</a:t>
             </a:r>
           </a:p>
         </p:txBody>
@@ -6188,9 +5986,9 @@
                   <a:srgbClr val="E8B23A"/>
                 </a:solidFill>
                 <a:latin typeface="Helvetica Neue"/>
-                <a:ea typeface="PingFang SC"/>
+                <a:ea typeface="Hiragino Sans GB"/>
               </a:rPr>
-              <a:t>MICHAEL JACKSON</a:t>
+              <a:t>迈克尔·杰克逊</a:t>
             </a:r>
             <a:r>
               <a:rPr sz="850" b="0" i="0">
@@ -6198,9 +5996,9 @@
                   <a:srgbClr val="958EA0"/>
                 </a:solidFill>
                 <a:latin typeface="Helvetica Neue"/>
-                <a:ea typeface="PingFang SC"/>
+                <a:ea typeface="Hiragino Sans GB"/>
               </a:rPr>
-              <a:t>   ·   流行乐之王</a:t>
+              <a:t>   ·   流行音乐之王</a:t>
             </a:r>
           </a:p>
         </p:txBody>
@@ -6245,7 +6043,7 @@
                   <a:srgbClr val="958EA0"/>
                 </a:solidFill>
                 <a:latin typeface="Helvetica Neue"/>
-                <a:ea typeface="PingFang SC"/>
+                <a:ea typeface="Hiragino Sans GB"/>
               </a:rPr>
               <a:t>11 / 14</a:t>
             </a:r>
@@ -6354,9 +6152,9 @@
                   <a:srgbClr val="8E8A96"/>
                 </a:solidFill>
                 <a:latin typeface="Helvetica Neue"/>
-                <a:ea typeface="PingFang SC"/>
+                <a:ea typeface="Hiragino Sans GB"/>
               </a:rPr>
-              <a:t>争议的一章</a:t>
+              <a:t>争议的一面</a:t>
             </a:r>
           </a:p>
         </p:txBody>
@@ -6401,7 +6199,7 @@
                   <a:srgbClr val="F3EFE6"/>
                 </a:solidFill>
                 <a:latin typeface="Didot"/>
-                <a:ea typeface="PingFang SC"/>
+                <a:ea typeface="Hiragino Sans GB"/>
               </a:rPr>
               <a:t>至今悬而未决的遗产</a:t>
             </a:r>
@@ -6492,7 +6290,7 @@
                   <a:srgbClr val="8E8A96"/>
                 </a:solidFill>
                 <a:latin typeface="Didot"/>
-                <a:ea typeface="PingFang SC"/>
+                <a:ea typeface="Hiragino Sans GB"/>
               </a:rPr>
               <a:t>MJ</a:t>
             </a:r>
@@ -6585,7 +6383,7 @@
                   <a:srgbClr val="BFBBC6"/>
                 </a:solidFill>
                 <a:latin typeface="Helvetica Neue"/>
-                <a:ea typeface="PingFang SC"/>
+                <a:ea typeface="Hiragino Sans GB"/>
               </a:rPr>
               <a:t>1993–94</a:t>
             </a:r>
@@ -6632,9 +6430,9 @@
                   <a:srgbClr val="CBC5D2"/>
                 </a:solidFill>
                 <a:latin typeface="Helvetica Neue"/>
-                <a:ea typeface="PingFang SC"/>
+                <a:ea typeface="Hiragino Sans GB"/>
               </a:rPr>
-              <a:t>被控性侵儿童。杰克逊于 1994 年就一桩民事诉讼达成和解；当时未被提起刑事指控，他否认有任何不当行为。</a:t>
+              <a:t>被指控性侵儿童。杰克逊于 1994 年就一桩民事诉讼达成和解；当时未被提起刑事指控，他本人否认任何不当行为。</a:t>
             </a:r>
           </a:p>
         </p:txBody>
@@ -6725,7 +6523,7 @@
                   <a:srgbClr val="BFBBC6"/>
                 </a:solidFill>
                 <a:latin typeface="Helvetica Neue"/>
-                <a:ea typeface="PingFang SC"/>
+                <a:ea typeface="Hiragino Sans GB"/>
               </a:rPr>
               <a:t>2005</a:t>
             </a:r>
@@ -6772,9 +6570,9 @@
                   <a:srgbClr val="CBC5D2"/>
                 </a:solidFill>
                 <a:latin typeface="Helvetica Neue"/>
-                <a:ea typeface="PingFang SC"/>
+                <a:ea typeface="Hiragino Sans GB"/>
               </a:rPr>
-              <a:t>在加州就刑事指控受审（People v. Jackson），全部罪名不成立。</a:t>
+              <a:t>在加利福尼亚州就刑事指控受审（People v. Jackson 案），所有罪名均被判不成立。</a:t>
             </a:r>
           </a:p>
         </p:txBody>
@@ -6865,7 +6663,7 @@
                   <a:srgbClr val="BFBBC6"/>
                 </a:solidFill>
                 <a:latin typeface="Helvetica Neue"/>
-                <a:ea typeface="PingFang SC"/>
+                <a:ea typeface="Hiragino Sans GB"/>
               </a:rPr>
               <a:t>2019</a:t>
             </a:r>
@@ -6912,9 +6710,9 @@
                   <a:srgbClr val="CBC5D2"/>
                 </a:solidFill>
                 <a:latin typeface="Helvetica Neue"/>
-                <a:ea typeface="PingFang SC"/>
+                <a:ea typeface="Hiragino Sans GB"/>
               </a:rPr>
-              <a:t>纪录片《Leaving Neverland》播出了两名男子的新指控；杰克逊遗产管理方对该片提出异议。</a:t>
+              <a:t>纪录片《Leaving Neverland》播出了两名男子提出的新指控；杰克逊遗产管理方对该片提出异议。</a:t>
             </a:r>
           </a:p>
         </p:txBody>
@@ -7051,9 +6849,9 @@
                   <a:srgbClr val="BFBBC6"/>
                 </a:solidFill>
                 <a:latin typeface="Helvetica Neue"/>
-                <a:ea typeface="PingFang SC"/>
+                <a:ea typeface="Hiragino Sans GB"/>
               </a:rPr>
-              <a:t>迈克尔·杰克逊否认了全部指控。这些疑问至今没有答案 —— 也无法与今天人们衡量他的生平与作品的方式割裂开来。</a:t>
+              <a:t>迈克尔·杰克逊否认了全部指控。这些疑问至今没有定论 —— 也无法与今天人们如何评价他的人生与作品分开。</a:t>
             </a:r>
           </a:p>
         </p:txBody>
@@ -7142,9 +6940,9 @@
                   <a:srgbClr val="8E8A96"/>
                 </a:solidFill>
                 <a:latin typeface="Helvetica Neue"/>
-                <a:ea typeface="PingFang SC"/>
+                <a:ea typeface="Hiragino Sans GB"/>
               </a:rPr>
-              <a:t>MICHAEL JACKSON</a:t>
+              <a:t>迈克尔·杰克逊</a:t>
             </a:r>
             <a:r>
               <a:rPr sz="850" b="0" i="0">
@@ -7152,9 +6950,9 @@
                   <a:srgbClr val="958EA0"/>
                 </a:solidFill>
                 <a:latin typeface="Helvetica Neue"/>
-                <a:ea typeface="PingFang SC"/>
+                <a:ea typeface="Hiragino Sans GB"/>
               </a:rPr>
-              <a:t>   ·   流行乐之王</a:t>
+              <a:t>   ·   流行音乐之王</a:t>
             </a:r>
           </a:p>
         </p:txBody>
@@ -7199,7 +6997,7 @@
                   <a:srgbClr val="958EA0"/>
                 </a:solidFill>
                 <a:latin typeface="Helvetica Neue"/>
-                <a:ea typeface="PingFang SC"/>
+                <a:ea typeface="Hiragino Sans GB"/>
               </a:rPr>
               <a:t>12 / 14</a:t>
             </a:r>
@@ -7308,7 +7106,7 @@
                   <a:srgbClr val="E8B23A"/>
                 </a:solidFill>
                 <a:latin typeface="Helvetica Neue"/>
-                <a:ea typeface="PingFang SC"/>
+                <a:ea typeface="Hiragino Sans GB"/>
               </a:rPr>
               <a:t>遗产</a:t>
             </a:r>
@@ -7355,9 +7153,9 @@
                   <a:srgbClr val="F3EFE6"/>
                 </a:solidFill>
                 <a:latin typeface="Didot"/>
-                <a:ea typeface="PingFang SC"/>
+                <a:ea typeface="Hiragino Sans GB"/>
               </a:rPr>
-              <a:t>现代流行巨星的范本</a:t>
+              <a:t>现代流行巨星的模板</a:t>
             </a:r>
           </a:p>
         </p:txBody>
@@ -7446,7 +7244,7 @@
                   <a:srgbClr val="E8B23A"/>
                 </a:solidFill>
                 <a:latin typeface="Didot"/>
-                <a:ea typeface="PingFang SC"/>
+                <a:ea typeface="Hiragino Sans GB"/>
               </a:rPr>
               <a:t>MJ</a:t>
             </a:r>
@@ -7493,7 +7291,7 @@
                   <a:srgbClr val="F3EFE6"/>
                 </a:solidFill>
                 <a:latin typeface="Didot"/>
-                <a:ea typeface="PingFang SC"/>
+                <a:ea typeface="Hiragino Sans GB"/>
               </a:rPr>
               <a:t>此后每一段</a:t>
             </a:r>
@@ -7516,9 +7314,9 @@
                   <a:srgbClr val="F3EFE6"/>
                 </a:solidFill>
                 <a:latin typeface="Didot"/>
-                <a:ea typeface="PingFang SC"/>
+                <a:ea typeface="Hiragino Sans GB"/>
               </a:rPr>
-              <a:t>坐满场馆、</a:t>
+              <a:t>坐满球馆、跨曲风、</a:t>
             </a:r>
           </a:p>
           <a:p>
@@ -7536,12 +7334,22 @@
             <a:r>
               <a:rPr sz="2700" b="0" i="0">
                 <a:solidFill>
+                  <a:srgbClr val="E8B23A"/>
+                </a:solidFill>
+                <a:latin typeface="Didot"/>
+                <a:ea typeface="Hiragino Sans GB"/>
+              </a:rPr>
+              <a:t>以录影带驱动</a:t>
+            </a:r>
+            <a:r>
+              <a:rPr sz="2700" b="0" i="0">
+                <a:solidFill>
                   <a:srgbClr val="F3EFE6"/>
                 </a:solidFill>
                 <a:latin typeface="Didot"/>
-                <a:ea typeface="PingFang SC"/>
+                <a:ea typeface="Hiragino Sans GB"/>
               </a:rPr>
-              <a:t>跨越曲风、</a:t>
+              <a:t>的流行生涯，</a:t>
             </a:r>
           </a:p>
           <a:p>
@@ -7557,24 +7365,14 @@
               </a:spcAft>
             </a:pPr>
             <a:r>
-              <a:rPr sz="2700" b="0" i="1">
-                <a:solidFill>
-                  <a:srgbClr val="E8B23A"/>
+              <a:rPr sz="2700" b="0" i="0">
+                <a:solidFill>
+                  <a:srgbClr val="F3EFE6"/>
                 </a:solidFill>
                 <a:latin typeface="Didot"/>
-                <a:ea typeface="PingFang SC"/>
+                <a:ea typeface="Hiragino Sans GB"/>
               </a:rPr>
-              <a:t>由 MV 驱动</a:t>
-            </a:r>
-            <a:r>
-              <a:rPr sz="2700" b="0" i="0">
-                <a:solidFill>
-                  <a:srgbClr val="F3EFE6"/>
-                </a:solidFill>
-                <a:latin typeface="Didot"/>
-                <a:ea typeface="PingFang SC"/>
-              </a:rPr>
-              <a:t>的流行生涯，</a:t>
+              <a:t>跑的都是</a:t>
             </a:r>
           </a:p>
           <a:p>
@@ -7595,9 +7393,9 @@
                   <a:srgbClr val="F3EFE6"/>
                 </a:solidFill>
                 <a:latin typeface="Didot"/>
-                <a:ea typeface="PingFang SC"/>
+                <a:ea typeface="Hiragino Sans GB"/>
               </a:rPr>
-              <a:t>都跑在他搭好的蓝图上。</a:t>
+              <a:t>他搭好的蓝图。</a:t>
             </a:r>
           </a:p>
         </p:txBody>
@@ -7611,7 +7409,7 @@
         <p:spPr>
           <a:xfrm>
             <a:off x="640080" y="4029963"/>
-            <a:ext cx="1060704" cy="365760"/>
+            <a:ext cx="1042416" cy="365760"/>
           </a:xfrm>
           <a:prstGeom prst="roundRect">
             <a:avLst>
@@ -7659,7 +7457,7 @@
         <p:spPr>
           <a:xfrm>
             <a:off x="640080" y="4029963"/>
-            <a:ext cx="1060704" cy="365760"/>
+            <a:ext cx="1042416" cy="365760"/>
           </a:xfrm>
           <a:prstGeom prst="rect">
             <a:avLst/>
@@ -7690,7 +7488,7 @@
                   <a:srgbClr val="E8B23A"/>
                 </a:solidFill>
                 <a:latin typeface="Helvetica Neue"/>
-                <a:ea typeface="PingFang SC"/>
+                <a:ea typeface="Hiragino Sans GB"/>
               </a:rPr>
               <a:t>专辑时代</a:t>
             </a:r>
@@ -7705,8 +7503,8 @@
         </p:nvSpPr>
         <p:spPr>
           <a:xfrm>
-            <a:off x="1883664" y="4029963"/>
-            <a:ext cx="1243584" cy="365760"/>
+            <a:off x="1865376" y="4029963"/>
+            <a:ext cx="1225296" cy="365760"/>
           </a:xfrm>
           <a:prstGeom prst="roundRect">
             <a:avLst>
@@ -7753,8 +7551,8 @@
         </p:nvSpPr>
         <p:spPr>
           <a:xfrm>
-            <a:off x="1883664" y="4029963"/>
-            <a:ext cx="1243584" cy="365760"/>
+            <a:off x="1865376" y="4029963"/>
+            <a:ext cx="1225296" cy="365760"/>
           </a:xfrm>
           <a:prstGeom prst="rect">
             <a:avLst/>
@@ -7785,9 +7583,9 @@
                   <a:srgbClr val="E8B23A"/>
                 </a:solidFill>
                 <a:latin typeface="Helvetica Neue"/>
-                <a:ea typeface="PingFang SC"/>
+                <a:ea typeface="Hiragino Sans GB"/>
               </a:rPr>
-              <a:t>MV 时代</a:t>
+              <a:t>录影带时代</a:t>
             </a:r>
           </a:p>
         </p:txBody>
@@ -7800,8 +7598,8 @@
         </p:nvSpPr>
         <p:spPr>
           <a:xfrm>
-            <a:off x="3310128" y="4029963"/>
-            <a:ext cx="1060704" cy="365760"/>
+            <a:off x="3273552" y="4029963"/>
+            <a:ext cx="1042416" cy="365760"/>
           </a:xfrm>
           <a:prstGeom prst="roundRect">
             <a:avLst>
@@ -7848,8 +7646,8 @@
         </p:nvSpPr>
         <p:spPr>
           <a:xfrm>
-            <a:off x="3310128" y="4029963"/>
-            <a:ext cx="1060704" cy="365760"/>
+            <a:off x="3273552" y="4029963"/>
+            <a:ext cx="1042416" cy="365760"/>
           </a:xfrm>
           <a:prstGeom prst="rect">
             <a:avLst/>
@@ -7880,7 +7678,7 @@
                   <a:srgbClr val="E8B23A"/>
                 </a:solidFill>
                 <a:latin typeface="Helvetica Neue"/>
-                <a:ea typeface="PingFang SC"/>
+                <a:ea typeface="Hiragino Sans GB"/>
               </a:rPr>
               <a:t>全球舞台</a:t>
             </a:r>
@@ -8362,14 +8160,14 @@
               </a:spcAft>
             </a:pPr>
             <a:r>
-              <a:rPr sz="1200" b="0" i="1">
+              <a:rPr sz="1200" b="0" i="0">
                 <a:solidFill>
                   <a:srgbClr val="958EA0"/>
                 </a:solidFill>
                 <a:latin typeface="Helvetica Neue"/>
-                <a:ea typeface="PingFang SC"/>
+                <a:ea typeface="Hiragino Sans GB"/>
               </a:rPr>
-              <a:t>从《Off the Wall》到《Invincible》—— 至今仍在播放。</a:t>
+              <a:t>从《Off the Wall》到《Invincible》—— 至今仍在播放列表里。</a:t>
             </a:r>
           </a:p>
         </p:txBody>
@@ -8458,9 +8256,9 @@
                   <a:srgbClr val="E8B23A"/>
                 </a:solidFill>
                 <a:latin typeface="Helvetica Neue"/>
-                <a:ea typeface="PingFang SC"/>
+                <a:ea typeface="Hiragino Sans GB"/>
               </a:rPr>
-              <a:t>MICHAEL JACKSON</a:t>
+              <a:t>迈克尔·杰克逊</a:t>
             </a:r>
             <a:r>
               <a:rPr sz="850" b="0" i="0">
@@ -8468,9 +8266,9 @@
                   <a:srgbClr val="958EA0"/>
                 </a:solidFill>
                 <a:latin typeface="Helvetica Neue"/>
-                <a:ea typeface="PingFang SC"/>
+                <a:ea typeface="Hiragino Sans GB"/>
               </a:rPr>
-              <a:t>   ·   流行乐之王</a:t>
+              <a:t>   ·   流行音乐之王</a:t>
             </a:r>
           </a:p>
         </p:txBody>
@@ -8515,7 +8313,7 @@
                   <a:srgbClr val="958EA0"/>
                 </a:solidFill>
                 <a:latin typeface="Helvetica Neue"/>
-                <a:ea typeface="PingFang SC"/>
+                <a:ea typeface="Hiragino Sans GB"/>
               </a:rPr>
               <a:t>13 / 14</a:t>
             </a:r>
@@ -8584,30 +8382,60 @@
           </a:p>
         </p:txBody>
       </p:sp>
-      <p:sp>
-        <p:nvSpPr>
-          <p:cNvPr id="3" name="Isosceles Triangle 2"/>
+      <p:pic>
+        <p:nvPicPr>
+          <p:cNvPr id="3" name="Picture 2" descr="" title=""/>
+          <p:cNvPicPr>
+            <a:picLocks noChangeAspect="1"/>
+          </p:cNvPicPr>
+          <p:nvPr/>
+        </p:nvPicPr>
+        <p:blipFill>
+          <a:blip r:embed="rId2"/>
+          <a:srcRect t="21875" b="21875"/>
+          <a:stretch>
+            <a:fillRect/>
+          </a:stretch>
+        </p:blipFill>
+        <p:spPr>
+          <a:xfrm>
+            <a:off x="0" y="0"/>
+            <a:ext cx="9144000" cy="5143500"/>
+          </a:xfrm>
+          <a:prstGeom prst="rect">
+            <a:avLst/>
+          </a:prstGeom>
+        </p:spPr>
+      </p:pic>
+      <p:sp>
+        <p:nvSpPr>
+          <p:cNvPr id="4" name="Rectangle 3"/>
           <p:cNvSpPr/>
           <p:nvPr/>
         </p:nvSpPr>
         <p:spPr>
           <a:xfrm>
-            <a:off x="2377440" y="0"/>
-            <a:ext cx="4389120" cy="5074920"/>
-          </a:xfrm>
-          <a:prstGeom prst="triangle">
+            <a:off x="0" y="0"/>
+            <a:ext cx="9144000" cy="5143500"/>
+          </a:xfrm>
+          <a:prstGeom prst="rect">
             <a:avLst/>
           </a:prstGeom>
           <a:gradFill>
             <a:gsLst>
               <a:gs pos="0">
-                <a:srgbClr val="E8B23A">
-                  <a:alpha val="17000"/>
+                <a:srgbClr val="000000">
+                  <a:alpha val="50000"/>
+                </a:srgbClr>
+              </a:gs>
+              <a:gs pos="50000">
+                <a:srgbClr val="000000">
+                  <a:alpha val="62000"/>
                 </a:srgbClr>
               </a:gs>
               <a:gs pos="100000">
-                <a:srgbClr val="E8B23A">
-                  <a:alpha val="0"/>
+                <a:srgbClr val="000000">
+                  <a:alpha val="66000"/>
                 </a:srgbClr>
               </a:gs>
             </a:gsLst>
@@ -8642,239 +8470,7 @@
       </p:sp>
       <p:sp>
         <p:nvSpPr>
-          <p:cNvPr id="4" name="Oval 3"/>
-          <p:cNvSpPr/>
-          <p:nvPr/>
-        </p:nvSpPr>
-        <p:spPr>
-          <a:xfrm>
-            <a:off x="2651760" y="0"/>
-            <a:ext cx="3840480" cy="2286000"/>
-          </a:xfrm>
-          <a:prstGeom prst="ellipse">
-            <a:avLst/>
-          </a:prstGeom>
-          <a:gradFill>
-            <a:gsLst>
-              <a:gs pos="0">
-                <a:srgbClr val="E8B23A">
-                  <a:alpha val="15000"/>
-                </a:srgbClr>
-              </a:gs>
-              <a:gs pos="100000">
-                <a:srgbClr val="E8B23A">
-                  <a:alpha val="0"/>
-                </a:srgbClr>
-              </a:gs>
-            </a:gsLst>
-            <a:path path="circle">
-              <a:fillToRect l="50000" t="50000" r="50000" b="50000"/>
-            </a:path>
-          </a:gradFill>
-          <a:ln>
-            <a:noFill/>
-          </a:ln>
-          <a:effectLst/>
-        </p:spPr>
-        <p:style>
-          <a:lnRef idx="1">
-            <a:schemeClr val="accent1"/>
-          </a:lnRef>
-          <a:fillRef idx="3">
-            <a:schemeClr val="accent1"/>
-          </a:fillRef>
-          <a:effectRef idx="2">
-            <a:schemeClr val="accent1"/>
-          </a:effectRef>
-          <a:fontRef idx="minor">
-            <a:schemeClr val="lt1"/>
-          </a:fontRef>
-        </p:style>
-        <p:txBody>
-          <a:bodyPr rtlCol="0" anchor="ctr"/>
-          <a:lstStyle/>
-          <a:p>
-            <a:pPr algn="ctr"/>
-          </a:p>
-        </p:txBody>
-      </p:sp>
-      <p:sp>
-        <p:nvSpPr>
-          <p:cNvPr id="5" name="Oval 4"/>
-          <p:cNvSpPr/>
-          <p:nvPr/>
-        </p:nvSpPr>
-        <p:spPr>
-          <a:xfrm>
-            <a:off x="3520440" y="0"/>
-            <a:ext cx="2103120" cy="1737360"/>
-          </a:xfrm>
-          <a:prstGeom prst="ellipse">
-            <a:avLst/>
-          </a:prstGeom>
-          <a:gradFill>
-            <a:gsLst>
-              <a:gs pos="0">
-                <a:srgbClr val="E8B23A">
-                  <a:alpha val="44000"/>
-                </a:srgbClr>
-              </a:gs>
-              <a:gs pos="100000">
-                <a:srgbClr val="E8B23A">
-                  <a:alpha val="0"/>
-                </a:srgbClr>
-              </a:gs>
-            </a:gsLst>
-            <a:path path="circle">
-              <a:fillToRect l="50000" t="50000" r="50000" b="50000"/>
-            </a:path>
-          </a:gradFill>
-          <a:ln>
-            <a:noFill/>
-          </a:ln>
-          <a:effectLst/>
-        </p:spPr>
-        <p:style>
-          <a:lnRef idx="1">
-            <a:schemeClr val="accent1"/>
-          </a:lnRef>
-          <a:fillRef idx="3">
-            <a:schemeClr val="accent1"/>
-          </a:fillRef>
-          <a:effectRef idx="2">
-            <a:schemeClr val="accent1"/>
-          </a:effectRef>
-          <a:fontRef idx="minor">
-            <a:schemeClr val="lt1"/>
-          </a:fontRef>
-        </p:style>
-        <p:txBody>
-          <a:bodyPr rtlCol="0" anchor="ctr"/>
-          <a:lstStyle/>
-          <a:p>
-            <a:pPr algn="ctr"/>
-          </a:p>
-        </p:txBody>
-      </p:sp>
-      <p:sp>
-        <p:nvSpPr>
-          <p:cNvPr id="6" name="Oval 5"/>
-          <p:cNvSpPr/>
-          <p:nvPr/>
-        </p:nvSpPr>
-        <p:spPr>
-          <a:xfrm>
-            <a:off x="731519" y="91439"/>
-            <a:ext cx="7680960" cy="4937760"/>
-          </a:xfrm>
-          <a:prstGeom prst="ellipse">
-            <a:avLst/>
-          </a:prstGeom>
-          <a:gradFill>
-            <a:gsLst>
-              <a:gs pos="0">
-                <a:srgbClr val="E8B23A">
-                  <a:alpha val="10000"/>
-                </a:srgbClr>
-              </a:gs>
-              <a:gs pos="100000">
-                <a:srgbClr val="E8B23A">
-                  <a:alpha val="0"/>
-                </a:srgbClr>
-              </a:gs>
-            </a:gsLst>
-            <a:path path="circle">
-              <a:fillToRect l="50000" t="50000" r="50000" b="50000"/>
-            </a:path>
-          </a:gradFill>
-          <a:ln>
-            <a:noFill/>
-          </a:ln>
-          <a:effectLst/>
-        </p:spPr>
-        <p:style>
-          <a:lnRef idx="1">
-            <a:schemeClr val="accent1"/>
-          </a:lnRef>
-          <a:fillRef idx="3">
-            <a:schemeClr val="accent1"/>
-          </a:fillRef>
-          <a:effectRef idx="2">
-            <a:schemeClr val="accent1"/>
-          </a:effectRef>
-          <a:fontRef idx="minor">
-            <a:schemeClr val="lt1"/>
-          </a:fontRef>
-        </p:style>
-        <p:txBody>
-          <a:bodyPr rtlCol="0" anchor="ctr"/>
-          <a:lstStyle/>
-          <a:p>
-            <a:pPr algn="ctr"/>
-          </a:p>
-        </p:txBody>
-      </p:sp>
-      <p:sp>
-        <p:nvSpPr>
-          <p:cNvPr id="7" name="Oval 6"/>
-          <p:cNvSpPr/>
-          <p:nvPr/>
-        </p:nvSpPr>
-        <p:spPr>
-          <a:xfrm>
-            <a:off x="1645919" y="3749039"/>
-            <a:ext cx="5852160" cy="1371600"/>
-          </a:xfrm>
-          <a:prstGeom prst="ellipse">
-            <a:avLst/>
-          </a:prstGeom>
-          <a:gradFill>
-            <a:gsLst>
-              <a:gs pos="0">
-                <a:srgbClr val="E8B23A">
-                  <a:alpha val="20000"/>
-                </a:srgbClr>
-              </a:gs>
-              <a:gs pos="100000">
-                <a:srgbClr val="E8B23A">
-                  <a:alpha val="0"/>
-                </a:srgbClr>
-              </a:gs>
-            </a:gsLst>
-            <a:path path="circle">
-              <a:fillToRect l="50000" t="50000" r="50000" b="50000"/>
-            </a:path>
-          </a:gradFill>
-          <a:ln>
-            <a:noFill/>
-          </a:ln>
-          <a:effectLst/>
-        </p:spPr>
-        <p:style>
-          <a:lnRef idx="1">
-            <a:schemeClr val="accent1"/>
-          </a:lnRef>
-          <a:fillRef idx="3">
-            <a:schemeClr val="accent1"/>
-          </a:fillRef>
-          <a:effectRef idx="2">
-            <a:schemeClr val="accent1"/>
-          </a:effectRef>
-          <a:fontRef idx="minor">
-            <a:schemeClr val="lt1"/>
-          </a:fontRef>
-        </p:style>
-        <p:txBody>
-          <a:bodyPr rtlCol="0" anchor="ctr"/>
-          <a:lstStyle/>
-          <a:p>
-            <a:pPr algn="ctr"/>
-          </a:p>
-        </p:txBody>
-      </p:sp>
-      <p:sp>
-        <p:nvSpPr>
-          <p:cNvPr id="8" name="Rectangle 7"/>
+          <p:cNvPr id="5" name="Rectangle 4"/>
           <p:cNvSpPr/>
           <p:nvPr/>
         </p:nvSpPr>
@@ -8930,7 +8526,7 @@
       </p:sp>
       <p:sp>
         <p:nvSpPr>
-          <p:cNvPr id="9" name="TextBox 8"/>
+          <p:cNvPr id="6" name="TextBox 5"/>
           <p:cNvSpPr txBox="1"/>
           <p:nvPr/>
         </p:nvSpPr>
@@ -8968,7 +8564,7 @@
                   <a:srgbClr val="E8B23A"/>
                 </a:solidFill>
                 <a:latin typeface="Helvetica Neue"/>
-                <a:ea typeface="PingFang SC"/>
+                <a:ea typeface="Hiragino Sans GB"/>
               </a:rPr>
               <a:t>1 9 5 8   —   2 0 0 9</a:t>
             </a:r>
@@ -8977,7 +8573,7 @@
       </p:sp>
       <p:sp>
         <p:nvSpPr>
-          <p:cNvPr id="10" name="TextBox 9"/>
+          <p:cNvPr id="7" name="TextBox 6"/>
           <p:cNvSpPr txBox="1"/>
           <p:nvPr/>
         </p:nvSpPr>
@@ -9015,16 +8611,16 @@
                   <a:srgbClr val="F3EFE6"/>
                 </a:solidFill>
                 <a:latin typeface="Didot"/>
-                <a:ea typeface="PingFang SC"/>
+                <a:ea typeface="Hiragino Sans GB"/>
               </a:rPr>
-              <a:t>流行乐之王，永垂不朽</a:t>
-            </a:r>
-          </a:p>
-        </p:txBody>
-      </p:sp>
-      <p:sp>
-        <p:nvSpPr>
-          <p:cNvPr id="11" name="Rectangle 10"/>
+              <a:t>流行音乐之王，永垂不朽</a:t>
+            </a:r>
+          </a:p>
+        </p:txBody>
+      </p:sp>
+      <p:sp>
+        <p:nvSpPr>
+          <p:cNvPr id="8" name="Rectangle 7"/>
           <p:cNvSpPr/>
           <p:nvPr/>
         </p:nvSpPr>
@@ -9068,7 +8664,7 @@
       </p:sp>
       <p:sp>
         <p:nvSpPr>
-          <p:cNvPr id="12" name="TextBox 11"/>
+          <p:cNvPr id="9" name="TextBox 8"/>
           <p:cNvSpPr txBox="1"/>
           <p:nvPr/>
         </p:nvSpPr>
@@ -9101,21 +8697,21 @@
               </a:spcAft>
             </a:pPr>
             <a:r>
-              <a:rPr sz="1400" b="0" i="1">
+              <a:rPr sz="1400" b="0" i="0">
                 <a:solidFill>
                   <a:srgbClr val="CBC5D2"/>
                 </a:solidFill>
                 <a:latin typeface="Helvetica Neue"/>
-                <a:ea typeface="PingFang SC"/>
+                <a:ea typeface="Hiragino Sans GB"/>
               </a:rPr>
-              <a:t>一套可复用的视觉系统 —— 换内容，留设计。</a:t>
-            </a:r>
-          </a:p>
-        </p:txBody>
-      </p:sp>
-      <p:sp>
-        <p:nvSpPr>
-          <p:cNvPr id="13" name="TextBox 12"/>
+              <a:t>一套可复用的视觉系统 —— 换掉内容，留下设计。</a:t>
+            </a:r>
+          </a:p>
+        </p:txBody>
+      </p:sp>
+      <p:sp>
+        <p:nvSpPr>
+          <p:cNvPr id="10" name="TextBox 9"/>
           <p:cNvSpPr txBox="1"/>
           <p:nvPr/>
         </p:nvSpPr>
@@ -9153,7 +8749,7 @@
                   <a:srgbClr val="E8B23A"/>
                 </a:solidFill>
                 <a:latin typeface="Helvetica Neue"/>
-                <a:ea typeface="PingFang SC"/>
+                <a:ea typeface="Hiragino Sans GB"/>
               </a:rPr>
               <a:t>来源</a:t>
             </a:r>
@@ -9162,7 +8758,7 @@
       </p:sp>
       <p:sp>
         <p:nvSpPr>
-          <p:cNvPr id="14" name="TextBox 13"/>
+          <p:cNvPr id="11" name="TextBox 10"/>
           <p:cNvSpPr txBox="1"/>
           <p:nvPr/>
         </p:nvSpPr>
@@ -9200,7 +8796,7 @@
                   <a:srgbClr val="958EA0"/>
                 </a:solidFill>
                 <a:latin typeface="Helvetica Neue"/>
-                <a:ea typeface="PingFang SC"/>
+                <a:ea typeface="Hiragino Sans GB"/>
               </a:rPr>
               <a:t>Billboard · Wikipedia · GRAMMY.com · RIAA · Rock &amp; Roll Hall of Fame · Britannica · Variety</a:t>
             </a:r>
@@ -9209,7 +8805,7 @@
       </p:sp>
       <p:sp>
         <p:nvSpPr>
-          <p:cNvPr id="15" name="TextBox 14"/>
+          <p:cNvPr id="12" name="TextBox 11"/>
           <p:cNvSpPr txBox="1"/>
           <p:nvPr/>
         </p:nvSpPr>
@@ -9247,9 +8843,9 @@
                   <a:srgbClr val="958EA0"/>
                 </a:solidFill>
                 <a:latin typeface="Helvetica Neue"/>
-                <a:ea typeface="PingFang SC"/>
+                <a:ea typeface="Hiragino Sans GB"/>
               </a:rPr>
-              <a:t>示例 DECK  ·  由 SLIDE-MAKER 构建</a:t>
+              <a:t>示例模板  ·  SLIDE-MAKER 出品</a:t>
             </a:r>
           </a:p>
         </p:txBody>
@@ -9356,9 +8952,9 @@
                   <a:srgbClr val="E8B23A"/>
                 </a:solidFill>
                 <a:latin typeface="Helvetica Neue"/>
-                <a:ea typeface="PingFang SC"/>
+                <a:ea typeface="Hiragino Sans GB"/>
               </a:rPr>
-              <a:t>生涯脉络</a:t>
+              <a:t>生涯轨迹</a:t>
             </a:r>
           </a:p>
         </p:txBody>
@@ -9403,9 +8999,9 @@
                   <a:srgbClr val="F3EFE6"/>
                 </a:solidFill>
                 <a:latin typeface="Didot"/>
-                <a:ea typeface="PingFang SC"/>
+                <a:ea typeface="Hiragino Sans GB"/>
               </a:rPr>
-              <a:t>一生，以无数个「第一次」丈量</a:t>
+              <a:t>一生，以无数「第一」为刻度</a:t>
             </a:r>
           </a:p>
         </p:txBody>
@@ -9494,7 +9090,7 @@
                   <a:srgbClr val="E8B23A"/>
                 </a:solidFill>
                 <a:latin typeface="Didot"/>
-                <a:ea typeface="PingFang SC"/>
+                <a:ea typeface="Hiragino Sans GB"/>
               </a:rPr>
               <a:t>MJ</a:t>
             </a:r>
@@ -9541,9 +9137,9 @@
                   <a:srgbClr val="CBC5D2"/>
                 </a:solidFill>
                 <a:latin typeface="Helvetica Neue"/>
-                <a:ea typeface="PingFang SC"/>
+                <a:ea typeface="Hiragino Sans GB"/>
               </a:rPr>
-              <a:t>1958 年生于印第安纳州加里市，迈克尔·杰克逊从一支 Motown 组合里最年轻的嗓音，一路成长为全世界最著名的演艺巨星。四十年间，他一次次重新定义了一张流行唱片、一支音乐录影带、一场现场演出所能抵达的高度 —— 也成了此后每一位全球流行巨星被拿来对照的那把标尺。</a:t>
+              <a:t>1958 年生于印第安纳州加里市，迈克尔·杰克逊从摩城组合里最年轻的那把嗓音，一路成为全世界最著名的艺人。四十年间，他重新定义了一张流行唱片、一支音乐录影带、一场现场演出能达到的高度，也成了此后每一位全球流行巨星被拿来对照的标尺。</a:t>
             </a:r>
           </a:p>
         </p:txBody>
@@ -9632,7 +9228,7 @@
                   <a:srgbClr val="E8B23A"/>
                 </a:solidFill>
                 <a:latin typeface="Helvetica Neue"/>
-                <a:ea typeface="PingFang SC"/>
+                <a:ea typeface="Hiragino Sans GB"/>
               </a:rPr>
               <a:t>400M+</a:t>
             </a:r>
@@ -9679,7 +9275,7 @@
                   <a:srgbClr val="CBC5D2"/>
                 </a:solidFill>
                 <a:latin typeface="Helvetica Neue"/>
-                <a:ea typeface="PingFang SC"/>
+                <a:ea typeface="Hiragino Sans GB"/>
               </a:rPr>
               <a:t>全球唱片销量（估计）</a:t>
             </a:r>
@@ -9726,7 +9322,7 @@
                   <a:srgbClr val="E8B23A"/>
                 </a:solidFill>
                 <a:latin typeface="Helvetica Neue"/>
-                <a:ea typeface="PingFang SC"/>
+                <a:ea typeface="Hiragino Sans GB"/>
               </a:rPr>
               <a:t>13</a:t>
             </a:r>
@@ -9773,9 +9369,9 @@
                   <a:srgbClr val="CBC5D2"/>
                 </a:solidFill>
                 <a:latin typeface="Helvetica Neue"/>
-                <a:ea typeface="PingFang SC"/>
+                <a:ea typeface="Hiragino Sans GB"/>
               </a:rPr>
-              <a:t>个人身份的美国冠军单曲</a:t>
+              <a:t>个人在美国的冠军单曲</a:t>
             </a:r>
           </a:p>
         </p:txBody>
@@ -9820,7 +9416,7 @@
                   <a:srgbClr val="E8B23A"/>
                 </a:solidFill>
                 <a:latin typeface="Helvetica Neue"/>
-                <a:ea typeface="PingFang SC"/>
+                <a:ea typeface="Hiragino Sans GB"/>
               </a:rPr>
               <a:t>67M</a:t>
             </a:r>
@@ -9867,9 +9463,9 @@
                   <a:srgbClr val="CBC5D2"/>
                 </a:solidFill>
                 <a:latin typeface="Helvetica Neue"/>
-                <a:ea typeface="PingFang SC"/>
+                <a:ea typeface="Hiragino Sans GB"/>
               </a:rPr>
-              <a:t>《Thriller》销量 —— 史上最畅销</a:t>
+              <a:t>《Thriller》销量，史上最畅销专辑</a:t>
             </a:r>
           </a:p>
         </p:txBody>
@@ -9958,9 +9554,9 @@
                   <a:srgbClr val="E8B23A"/>
                 </a:solidFill>
                 <a:latin typeface="Helvetica Neue"/>
-                <a:ea typeface="PingFang SC"/>
+                <a:ea typeface="Hiragino Sans GB"/>
               </a:rPr>
-              <a:t>MICHAEL JACKSON</a:t>
+              <a:t>迈克尔·杰克逊</a:t>
             </a:r>
             <a:r>
               <a:rPr sz="850" b="0" i="0">
@@ -9968,9 +9564,9 @@
                   <a:srgbClr val="958EA0"/>
                 </a:solidFill>
                 <a:latin typeface="Helvetica Neue"/>
-                <a:ea typeface="PingFang SC"/>
+                <a:ea typeface="Hiragino Sans GB"/>
               </a:rPr>
-              <a:t>   ·   流行乐之王</a:t>
+              <a:t>   ·   流行音乐之王</a:t>
             </a:r>
           </a:p>
         </p:txBody>
@@ -10015,7 +9611,7 @@
                   <a:srgbClr val="958EA0"/>
                 </a:solidFill>
                 <a:latin typeface="Helvetica Neue"/>
-                <a:ea typeface="PingFang SC"/>
+                <a:ea typeface="Hiragino Sans GB"/>
               </a:rPr>
               <a:t>02 / 14</a:t>
             </a:r>
@@ -10124,7 +9720,7 @@
                   <a:srgbClr val="E8B23A"/>
                 </a:solidFill>
                 <a:latin typeface="Helvetica Neue"/>
-                <a:ea typeface="PingFang SC"/>
+                <a:ea typeface="Hiragino Sans GB"/>
               </a:rPr>
               <a:t>1969–1975 · JACKSON 5</a:t>
             </a:r>
@@ -10171,7 +9767,7 @@
                   <a:srgbClr val="F3EFE6"/>
                 </a:solidFill>
                 <a:latin typeface="Didot"/>
-                <a:ea typeface="PingFang SC"/>
+                <a:ea typeface="Hiragino Sans GB"/>
               </a:rPr>
               <a:t>四支单曲，四次登顶</a:t>
             </a:r>
@@ -10262,7 +9858,7 @@
                   <a:srgbClr val="E8B23A"/>
                 </a:solidFill>
                 <a:latin typeface="Didot"/>
-                <a:ea typeface="PingFang SC"/>
+                <a:ea typeface="Hiragino Sans GB"/>
               </a:rPr>
               <a:t>MJ</a:t>
             </a:r>
@@ -10309,9 +9905,9 @@
                   <a:srgbClr val="CBC5D2"/>
                 </a:solidFill>
                 <a:latin typeface="Helvetica Neue"/>
-                <a:ea typeface="PingFang SC"/>
+                <a:ea typeface="Hiragino Sans GB"/>
               </a:rPr>
-              <a:t>1968 年签约 Motown，这五位来自加里市的兄弟，很快就创造了历史。</a:t>
+              <a:t>1968 年签约摩城，来自加里市的五兄弟很快改写了历史。</a:t>
             </a:r>
           </a:p>
         </p:txBody>
@@ -10356,7 +9952,7 @@
                   <a:srgbClr val="E8B23A"/>
                 </a:solidFill>
                 <a:latin typeface="Helvetica Neue"/>
-                <a:ea typeface="PingFang SC"/>
+                <a:ea typeface="Hiragino Sans GB"/>
               </a:rPr>
               <a:t>N o . 1</a:t>
             </a:r>
@@ -10497,7 +10093,7 @@
                   <a:srgbClr val="F3EFE6"/>
                 </a:solidFill>
                 <a:latin typeface="Helvetica Neue"/>
-                <a:ea typeface="PingFang SC"/>
+                <a:ea typeface="Hiragino Sans GB"/>
               </a:rPr>
               <a:t>I Want You Back</a:t>
             </a:r>
@@ -10544,7 +10140,7 @@
                   <a:srgbClr val="958EA0"/>
                 </a:solidFill>
                 <a:latin typeface="Helvetica Neue"/>
-                <a:ea typeface="PingFang SC"/>
+                <a:ea typeface="Hiragino Sans GB"/>
               </a:rPr>
               <a:t>1969</a:t>
             </a:r>
@@ -10635,7 +10231,7 @@
                   <a:srgbClr val="E8B23A"/>
                 </a:solidFill>
                 <a:latin typeface="Helvetica Neue"/>
-                <a:ea typeface="PingFang SC"/>
+                <a:ea typeface="Hiragino Sans GB"/>
               </a:rPr>
               <a:t>N o . 1</a:t>
             </a:r>
@@ -10776,7 +10372,7 @@
                   <a:srgbClr val="F3EFE6"/>
                 </a:solidFill>
                 <a:latin typeface="Helvetica Neue"/>
-                <a:ea typeface="PingFang SC"/>
+                <a:ea typeface="Hiragino Sans GB"/>
               </a:rPr>
               <a:t>ABC</a:t>
             </a:r>
@@ -10823,7 +10419,7 @@
                   <a:srgbClr val="958EA0"/>
                 </a:solidFill>
                 <a:latin typeface="Helvetica Neue"/>
-                <a:ea typeface="PingFang SC"/>
+                <a:ea typeface="Hiragino Sans GB"/>
               </a:rPr>
               <a:t>1970</a:t>
             </a:r>
@@ -10914,7 +10510,7 @@
                   <a:srgbClr val="E8B23A"/>
                 </a:solidFill>
                 <a:latin typeface="Helvetica Neue"/>
-                <a:ea typeface="PingFang SC"/>
+                <a:ea typeface="Hiragino Sans GB"/>
               </a:rPr>
               <a:t>N o . 1</a:t>
             </a:r>
@@ -11055,7 +10651,7 @@
                   <a:srgbClr val="F3EFE6"/>
                 </a:solidFill>
                 <a:latin typeface="Helvetica Neue"/>
-                <a:ea typeface="PingFang SC"/>
+                <a:ea typeface="Hiragino Sans GB"/>
               </a:rPr>
               <a:t>The Love You Save</a:t>
             </a:r>
@@ -11102,7 +10698,7 @@
                   <a:srgbClr val="958EA0"/>
                 </a:solidFill>
                 <a:latin typeface="Helvetica Neue"/>
-                <a:ea typeface="PingFang SC"/>
+                <a:ea typeface="Hiragino Sans GB"/>
               </a:rPr>
               <a:t>1970</a:t>
             </a:r>
@@ -11193,7 +10789,7 @@
                   <a:srgbClr val="E8B23A"/>
                 </a:solidFill>
                 <a:latin typeface="Helvetica Neue"/>
-                <a:ea typeface="PingFang SC"/>
+                <a:ea typeface="Hiragino Sans GB"/>
               </a:rPr>
               <a:t>N o . 1</a:t>
             </a:r>
@@ -11334,7 +10930,7 @@
                   <a:srgbClr val="F3EFE6"/>
                 </a:solidFill>
                 <a:latin typeface="Helvetica Neue"/>
-                <a:ea typeface="PingFang SC"/>
+                <a:ea typeface="Hiragino Sans GB"/>
               </a:rPr>
               <a:t>I'll Be There</a:t>
             </a:r>
@@ -11381,7 +10977,7 @@
                   <a:srgbClr val="958EA0"/>
                 </a:solidFill>
                 <a:latin typeface="Helvetica Neue"/>
-                <a:ea typeface="PingFang SC"/>
+                <a:ea typeface="Hiragino Sans GB"/>
               </a:rPr>
               <a:t>1970</a:t>
             </a:r>
@@ -11428,9 +11024,9 @@
                   <a:srgbClr val="E8B23A"/>
                 </a:solidFill>
                 <a:latin typeface="Helvetica Neue"/>
-                <a:ea typeface="PingFang SC"/>
+                <a:ea typeface="Hiragino Sans GB"/>
               </a:rPr>
-              <a:t>史上首个「出道即连续四支 Billboard Hot 100 冠军单曲」的组合。</a:t>
+              <a:t>史上首个出道即拿下 Billboard Hot 100 四连冠的组合。</a:t>
             </a:r>
           </a:p>
         </p:txBody>
@@ -11519,9 +11115,9 @@
                   <a:srgbClr val="E8B23A"/>
                 </a:solidFill>
                 <a:latin typeface="Helvetica Neue"/>
-                <a:ea typeface="PingFang SC"/>
+                <a:ea typeface="Hiragino Sans GB"/>
               </a:rPr>
-              <a:t>MICHAEL JACKSON</a:t>
+              <a:t>迈克尔·杰克逊</a:t>
             </a:r>
             <a:r>
               <a:rPr sz="850" b="0" i="0">
@@ -11529,9 +11125,9 @@
                   <a:srgbClr val="958EA0"/>
                 </a:solidFill>
                 <a:latin typeface="Helvetica Neue"/>
-                <a:ea typeface="PingFang SC"/>
+                <a:ea typeface="Hiragino Sans GB"/>
               </a:rPr>
-              <a:t>   ·   流行乐之王</a:t>
+              <a:t>   ·   流行音乐之王</a:t>
             </a:r>
           </a:p>
         </p:txBody>
@@ -11576,7 +11172,7 @@
                   <a:srgbClr val="958EA0"/>
                 </a:solidFill>
                 <a:latin typeface="Helvetica Neue"/>
-                <a:ea typeface="PingFang SC"/>
+                <a:ea typeface="Hiragino Sans GB"/>
               </a:rPr>
               <a:t>03 / 14</a:t>
             </a:r>
@@ -11685,7 +11281,7 @@
                   <a:srgbClr val="E8B23A"/>
                 </a:solidFill>
                 <a:latin typeface="Helvetica Neue"/>
-                <a:ea typeface="PingFang SC"/>
+                <a:ea typeface="Hiragino Sans GB"/>
               </a:rPr>
               <a:t>1979 · OFF THE WALL</a:t>
             </a:r>
@@ -11732,9 +11328,9 @@
                   <a:srgbClr val="F3EFE6"/>
                 </a:solidFill>
                 <a:latin typeface="Didot"/>
-                <a:ea typeface="PingFang SC"/>
+                <a:ea typeface="Hiragino Sans GB"/>
               </a:rPr>
-              <a:t>从神童到大师的转身</a:t>
+              <a:t>从神童到艺术家的转身</a:t>
             </a:r>
           </a:p>
         </p:txBody>
@@ -11823,7 +11419,7 @@
                   <a:srgbClr val="E8B23A"/>
                 </a:solidFill>
                 <a:latin typeface="Didot"/>
-                <a:ea typeface="PingFang SC"/>
+                <a:ea typeface="Hiragino Sans GB"/>
               </a:rPr>
               <a:t>MJ</a:t>
             </a:r>
@@ -12310,9 +11906,9 @@
                   <a:srgbClr val="CBC5D2"/>
                 </a:solidFill>
                 <a:latin typeface="Helvetica Neue"/>
-                <a:ea typeface="PingFang SC"/>
+                <a:ea typeface="Hiragino Sans GB"/>
               </a:rPr>
-              <a:t>与制作人 Quincy Jones 再度携手，这张成年后的首张个人专辑把 disco、放克与流行熔于一炉，打磨出一种精致、且只属于他的声音 —— 也成了此后一切的起点。</a:t>
+              <a:t>与制作人昆西·琼斯再度合作，这张真正成熟的个人专辑把迪斯科、放克与流行熔于一体，光洁利落、辨识度十足 —— 也成了他此后一切的起跳板。</a:t>
             </a:r>
           </a:p>
         </p:txBody>
@@ -12357,7 +11953,7 @@
                   <a:srgbClr val="E8B23A"/>
                 </a:solidFill>
                 <a:latin typeface="Helvetica Neue"/>
-                <a:ea typeface="PingFang SC"/>
+                <a:ea typeface="Hiragino Sans GB"/>
               </a:rPr>
               <a:t>发行</a:t>
             </a:r>
@@ -12404,7 +12000,7 @@
                   <a:srgbClr val="F3EFE6"/>
                 </a:solidFill>
                 <a:latin typeface="Helvetica Neue"/>
-                <a:ea typeface="PingFang SC"/>
+                <a:ea typeface="Hiragino Sans GB"/>
               </a:rPr>
               <a:t>1979</a:t>
             </a:r>
@@ -12495,7 +12091,7 @@
                   <a:srgbClr val="E8B23A"/>
                 </a:solidFill>
                 <a:latin typeface="Helvetica Neue"/>
-                <a:ea typeface="PingFang SC"/>
+                <a:ea typeface="Hiragino Sans GB"/>
               </a:rPr>
               <a:t>制作人</a:t>
             </a:r>
@@ -12527,7 +12123,7 @@
           <a:p>
             <a:pPr algn="l">
               <a:lnSpc>
-                <a:spcPct val="100000"/>
+                <a:spcPct val="112000"/>
               </a:lnSpc>
               <a:spcBef>
                 <a:spcPts val="0"/>
@@ -12542,9 +12138,9 @@
                   <a:srgbClr val="F3EFE6"/>
                 </a:solidFill>
                 <a:latin typeface="Helvetica Neue"/>
-                <a:ea typeface="PingFang SC"/>
+                <a:ea typeface="Hiragino Sans GB"/>
               </a:rPr>
-              <a:t>Quincy Jones</a:t>
+              <a:t>昆西·琼斯</a:t>
             </a:r>
           </a:p>
         </p:txBody>
@@ -12633,7 +12229,7 @@
                   <a:srgbClr val="E8B23A"/>
                 </a:solidFill>
                 <a:latin typeface="Helvetica Neue"/>
-                <a:ea typeface="PingFang SC"/>
+                <a:ea typeface="Hiragino Sans GB"/>
               </a:rPr>
               <a:t>曲风</a:t>
             </a:r>
@@ -12680,9 +12276,9 @@
                   <a:srgbClr val="F3EFE6"/>
                 </a:solidFill>
                 <a:latin typeface="Helvetica Neue"/>
-                <a:ea typeface="PingFang SC"/>
+                <a:ea typeface="Hiragino Sans GB"/>
               </a:rPr>
-              <a:t>Disco · 放克 · 流行</a:t>
+              <a:t>迪斯科 · 放克 · 流行</a:t>
             </a:r>
           </a:p>
         </p:txBody>
@@ -12815,9 +12411,9 @@
                   <a:srgbClr val="E8B23A"/>
                 </a:solidFill>
                 <a:latin typeface="Helvetica Neue"/>
-                <a:ea typeface="PingFang SC"/>
+                <a:ea typeface="Hiragino Sans GB"/>
               </a:rPr>
-              <a:t>MICHAEL JACKSON</a:t>
+              <a:t>迈克尔·杰克逊</a:t>
             </a:r>
             <a:r>
               <a:rPr sz="850" b="0" i="0">
@@ -12825,9 +12421,9 @@
                   <a:srgbClr val="958EA0"/>
                 </a:solidFill>
                 <a:latin typeface="Helvetica Neue"/>
-                <a:ea typeface="PingFang SC"/>
+                <a:ea typeface="Hiragino Sans GB"/>
               </a:rPr>
-              <a:t>   ·   流行乐之王</a:t>
+              <a:t>   ·   流行音乐之王</a:t>
             </a:r>
           </a:p>
         </p:txBody>
@@ -12872,7 +12468,7 @@
                   <a:srgbClr val="958EA0"/>
                 </a:solidFill>
                 <a:latin typeface="Helvetica Neue"/>
-                <a:ea typeface="PingFang SC"/>
+                <a:ea typeface="Hiragino Sans GB"/>
               </a:rPr>
               <a:t>04 / 14</a:t>
             </a:r>
@@ -13039,7 +12635,7 @@
                   <a:srgbClr val="E8B23A"/>
                 </a:solidFill>
                 <a:latin typeface="Helvetica Neue"/>
-                <a:ea typeface="PingFang SC"/>
+                <a:ea typeface="Hiragino Sans GB"/>
               </a:rPr>
               <a:t>1982 · THRILLER</a:t>
             </a:r>
@@ -13086,7 +12682,7 @@
                   <a:srgbClr val="F3EFE6"/>
                 </a:solidFill>
                 <a:latin typeface="Didot"/>
-                <a:ea typeface="PingFang SC"/>
+                <a:ea typeface="Hiragino Sans GB"/>
               </a:rPr>
               <a:t>史上最畅销的专辑</a:t>
             </a:r>
@@ -13177,7 +12773,7 @@
                   <a:srgbClr val="E8B23A"/>
                 </a:solidFill>
                 <a:latin typeface="Didot"/>
-                <a:ea typeface="PingFang SC"/>
+                <a:ea typeface="Hiragino Sans GB"/>
               </a:rPr>
               <a:t>MJ</a:t>
             </a:r>
@@ -13223,7 +12819,7 @@
                   <a:srgbClr val="E8B23A"/>
                 </a:solidFill>
                 <a:latin typeface="Helvetica Neue"/>
-                <a:ea typeface="PingFang SC"/>
+                <a:ea typeface="Hiragino Sans GB"/>
               </a:rPr>
               <a:t>67M</a:t>
             </a:r>
@@ -13270,7 +12866,7 @@
                   <a:srgbClr val="F3EFE6"/>
                 </a:solidFill>
                 <a:latin typeface="Helvetica Neue"/>
-                <a:ea typeface="PingFang SC"/>
+                <a:ea typeface="Hiragino Sans GB"/>
               </a:rPr>
               <a:t>全球销量（估计）—— 至今没有一张专辑卖得更多</a:t>
             </a:r>
@@ -13412,7 +13008,7 @@
                   <a:srgbClr val="E8B23A"/>
                 </a:solidFill>
                 <a:latin typeface="Helvetica Neue"/>
-                <a:ea typeface="PingFang SC"/>
+                <a:ea typeface="Hiragino Sans GB"/>
               </a:rPr>
               <a:t>8</a:t>
             </a:r>
@@ -13459,9 +13055,9 @@
                   <a:srgbClr val="CBC5D2"/>
                 </a:solidFill>
                 <a:latin typeface="Helvetica Neue"/>
-                <a:ea typeface="PingFang SC"/>
+                <a:ea typeface="Hiragino Sans GB"/>
               </a:rPr>
-              <a:t>一夜之间斩获的</a:t>
+              <a:t>一夜之内</a:t>
             </a:r>
           </a:p>
           <a:p>
@@ -13482,9 +13078,9 @@
                   <a:srgbClr val="CBC5D2"/>
                 </a:solidFill>
                 <a:latin typeface="Helvetica Neue"/>
-                <a:ea typeface="PingFang SC"/>
+                <a:ea typeface="Hiragino Sans GB"/>
               </a:rPr>
-              <a:t>格莱美（1984）</a:t>
+              <a:t>格莱美 (1984)</a:t>
             </a:r>
           </a:p>
         </p:txBody>
@@ -13624,7 +13220,7 @@
                   <a:srgbClr val="E8B23A"/>
                 </a:solidFill>
                 <a:latin typeface="Helvetica Neue"/>
-                <a:ea typeface="PingFang SC"/>
+                <a:ea typeface="Hiragino Sans GB"/>
               </a:rPr>
               <a:t>7</a:t>
             </a:r>
@@ -13671,7 +13267,7 @@
                   <a:srgbClr val="CBC5D2"/>
                 </a:solidFill>
                 <a:latin typeface="Helvetica Neue"/>
-                <a:ea typeface="PingFang SC"/>
+                <a:ea typeface="Hiragino Sans GB"/>
               </a:rPr>
               <a:t>支单曲进入</a:t>
             </a:r>
@@ -13694,9 +13290,9 @@
                   <a:srgbClr val="CBC5D2"/>
                 </a:solidFill>
                 <a:latin typeface="Helvetica Neue"/>
-                <a:ea typeface="PingFang SC"/>
+                <a:ea typeface="Hiragino Sans GB"/>
               </a:rPr>
-              <a:t>美国榜前十</a:t>
+              <a:t>全美 Top 10</a:t>
             </a:r>
           </a:p>
         </p:txBody>
@@ -13836,7 +13432,7 @@
                   <a:srgbClr val="E8B23A"/>
                 </a:solidFill>
                 <a:latin typeface="Helvetica Neue"/>
-                <a:ea typeface="PingFang SC"/>
+                <a:ea typeface="Hiragino Sans GB"/>
               </a:rPr>
               <a:t>30×</a:t>
             </a:r>
@@ -13883,9 +13479,9 @@
                   <a:srgbClr val="CBC5D2"/>
                 </a:solidFill>
                 <a:latin typeface="Helvetica Neue"/>
-                <a:ea typeface="PingFang SC"/>
+                <a:ea typeface="Hiragino Sans GB"/>
               </a:rPr>
-              <a:t>首张获认证的</a:t>
+              <a:t>白金认证</a:t>
             </a:r>
           </a:p>
           <a:p>
@@ -13906,9 +13502,9 @@
                   <a:srgbClr val="CBC5D2"/>
                 </a:solidFill>
                 <a:latin typeface="Helvetica Neue"/>
-                <a:ea typeface="PingFang SC"/>
+                <a:ea typeface="Hiragino Sans GB"/>
               </a:rPr>
-              <a:t>30× 白金专辑（RIAA）</a:t>
+              <a:t>史上首张 (RIAA)</a:t>
             </a:r>
           </a:p>
         </p:txBody>
@@ -14011,9 +13607,9 @@
                   <a:srgbClr val="F3EFE6"/>
                 </a:solidFill>
                 <a:latin typeface="Helvetica Neue"/>
-                <a:ea typeface="PingFang SC"/>
+                <a:ea typeface="Hiragino Sans GB"/>
               </a:rPr>
-              <a:t>一夜之间八座格莱美（1984 年 2 月 28 日），创下当时纪录 —— 并同时送出两支 Hot 100 冠军单曲：</a:t>
+              <a:t>一夜之内八座格莱美，创下当时纪录（1984 年 2 月 28 日）—— </a:t>
             </a:r>
             <a:r>
               <a:rPr sz="1200" b="1" i="1">
@@ -14021,7 +13617,7 @@
                   <a:srgbClr val="E8B23A"/>
                 </a:solidFill>
                 <a:latin typeface="Helvetica Neue"/>
-                <a:ea typeface="PingFang SC"/>
+                <a:ea typeface="Hiragino Sans GB"/>
               </a:rPr>
               <a:t>Billie Jean</a:t>
             </a:r>
@@ -14031,7 +13627,7 @@
                   <a:srgbClr val="F3EFE6"/>
                 </a:solidFill>
                 <a:latin typeface="Helvetica Neue"/>
-                <a:ea typeface="PingFang SC"/>
+                <a:ea typeface="Hiragino Sans GB"/>
               </a:rPr>
               <a:t> 与 </a:t>
             </a:r>
@@ -14041,7 +13637,7 @@
                   <a:srgbClr val="E8B23A"/>
                 </a:solidFill>
                 <a:latin typeface="Helvetica Neue"/>
-                <a:ea typeface="PingFang SC"/>
+                <a:ea typeface="Hiragino Sans GB"/>
               </a:rPr>
               <a:t>Beat It</a:t>
             </a:r>
@@ -14051,9 +13647,9 @@
                   <a:srgbClr val="F3EFE6"/>
                 </a:solidFill>
                 <a:latin typeface="Helvetica Neue"/>
-                <a:ea typeface="PingFang SC"/>
+                <a:ea typeface="Hiragino Sans GB"/>
               </a:rPr>
-              <a:t>。</a:t>
+              <a:t> 双双登顶 Hot 100。</a:t>
             </a:r>
           </a:p>
         </p:txBody>
@@ -14142,9 +13738,9 @@
                   <a:srgbClr val="E8B23A"/>
                 </a:solidFill>
                 <a:latin typeface="Helvetica Neue"/>
-                <a:ea typeface="PingFang SC"/>
+                <a:ea typeface="Hiragino Sans GB"/>
               </a:rPr>
-              <a:t>MICHAEL JACKSON</a:t>
+              <a:t>迈克尔·杰克逊</a:t>
             </a:r>
             <a:r>
               <a:rPr sz="850" b="0" i="0">
@@ -14152,9 +13748,9 @@
                   <a:srgbClr val="958EA0"/>
                 </a:solidFill>
                 <a:latin typeface="Helvetica Neue"/>
-                <a:ea typeface="PingFang SC"/>
+                <a:ea typeface="Hiragino Sans GB"/>
               </a:rPr>
-              <a:t>   ·   流行乐之王</a:t>
+              <a:t>   ·   流行音乐之王</a:t>
             </a:r>
           </a:p>
         </p:txBody>
@@ -14199,7 +13795,7 @@
                   <a:srgbClr val="958EA0"/>
                 </a:solidFill>
                 <a:latin typeface="Helvetica Neue"/>
-                <a:ea typeface="PingFang SC"/>
+                <a:ea typeface="Hiragino Sans GB"/>
               </a:rPr>
               <a:t>05 / 14</a:t>
             </a:r>
@@ -14268,34 +13864,64 @@
           </a:p>
         </p:txBody>
       </p:sp>
-      <p:sp>
-        <p:nvSpPr>
-          <p:cNvPr id="3" name="Isosceles Triangle 2"/>
+      <p:pic>
+        <p:nvPicPr>
+          <p:cNvPr id="3" name="Picture 2" descr="" title=""/>
+          <p:cNvPicPr>
+            <a:picLocks noChangeAspect="1"/>
+          </p:cNvPicPr>
+          <p:nvPr/>
+        </p:nvPicPr>
+        <p:blipFill>
+          <a:blip r:embed="rId2"/>
+          <a:srcRect l="13556" r="13556"/>
+          <a:stretch>
+            <a:fillRect/>
+          </a:stretch>
+        </p:blipFill>
+        <p:spPr>
+          <a:xfrm>
+            <a:off x="5394960" y="0"/>
+            <a:ext cx="3749039" cy="5143500"/>
+          </a:xfrm>
+          <a:prstGeom prst="rect">
+            <a:avLst/>
+          </a:prstGeom>
+        </p:spPr>
+      </p:pic>
+      <p:sp>
+        <p:nvSpPr>
+          <p:cNvPr id="4" name="Rectangle 3"/>
           <p:cNvSpPr/>
           <p:nvPr/>
         </p:nvSpPr>
         <p:spPr>
           <a:xfrm>
-            <a:off x="2377440" y="0"/>
-            <a:ext cx="4389120" cy="5074920"/>
-          </a:xfrm>
-          <a:prstGeom prst="triangle">
+            <a:off x="4754880" y="0"/>
+            <a:ext cx="4389120" cy="5143500"/>
+          </a:xfrm>
+          <a:prstGeom prst="rect">
             <a:avLst/>
           </a:prstGeom>
           <a:gradFill>
             <a:gsLst>
               <a:gs pos="0">
-                <a:srgbClr val="E8B23A">
-                  <a:alpha val="17000"/>
+                <a:srgbClr val="0E0D13">
+                  <a:alpha val="100000"/>
                 </a:srgbClr>
               </a:gs>
-              <a:gs pos="100000">
-                <a:srgbClr val="E8B23A">
+              <a:gs pos="34000">
+                <a:srgbClr val="0E0D13">
+                  <a:alpha val="16000"/>
+                </a:srgbClr>
+              </a:gs>
+              <a:gs pos="62000">
+                <a:srgbClr val="0E0D13">
                   <a:alpha val="0"/>
                 </a:srgbClr>
               </a:gs>
             </a:gsLst>
-            <a:lin ang="5400000" scaled="1"/>
+            <a:lin ang="0" scaled="1"/>
           </a:gradFill>
           <a:ln>
             <a:noFill/>
@@ -14326,246 +13952,14 @@
       </p:sp>
       <p:sp>
         <p:nvSpPr>
-          <p:cNvPr id="4" name="Oval 3"/>
-          <p:cNvSpPr/>
-          <p:nvPr/>
-        </p:nvSpPr>
-        <p:spPr>
-          <a:xfrm>
-            <a:off x="2651760" y="0"/>
-            <a:ext cx="3840480" cy="2286000"/>
-          </a:xfrm>
-          <a:prstGeom prst="ellipse">
-            <a:avLst/>
-          </a:prstGeom>
-          <a:gradFill>
-            <a:gsLst>
-              <a:gs pos="0">
-                <a:srgbClr val="E8B23A">
-                  <a:alpha val="15000"/>
-                </a:srgbClr>
-              </a:gs>
-              <a:gs pos="100000">
-                <a:srgbClr val="E8B23A">
-                  <a:alpha val="0"/>
-                </a:srgbClr>
-              </a:gs>
-            </a:gsLst>
-            <a:path path="circle">
-              <a:fillToRect l="50000" t="50000" r="50000" b="50000"/>
-            </a:path>
-          </a:gradFill>
-          <a:ln>
-            <a:noFill/>
-          </a:ln>
-          <a:effectLst/>
-        </p:spPr>
-        <p:style>
-          <a:lnRef idx="1">
-            <a:schemeClr val="accent1"/>
-          </a:lnRef>
-          <a:fillRef idx="3">
-            <a:schemeClr val="accent1"/>
-          </a:fillRef>
-          <a:effectRef idx="2">
-            <a:schemeClr val="accent1"/>
-          </a:effectRef>
-          <a:fontRef idx="minor">
-            <a:schemeClr val="lt1"/>
-          </a:fontRef>
-        </p:style>
-        <p:txBody>
-          <a:bodyPr rtlCol="0" anchor="ctr"/>
-          <a:lstStyle/>
-          <a:p>
-            <a:pPr algn="ctr"/>
-          </a:p>
-        </p:txBody>
-      </p:sp>
-      <p:sp>
-        <p:nvSpPr>
-          <p:cNvPr id="5" name="Oval 4"/>
-          <p:cNvSpPr/>
-          <p:nvPr/>
-        </p:nvSpPr>
-        <p:spPr>
-          <a:xfrm>
-            <a:off x="3520440" y="0"/>
-            <a:ext cx="2103120" cy="1737360"/>
-          </a:xfrm>
-          <a:prstGeom prst="ellipse">
-            <a:avLst/>
-          </a:prstGeom>
-          <a:gradFill>
-            <a:gsLst>
-              <a:gs pos="0">
-                <a:srgbClr val="E8B23A">
-                  <a:alpha val="44000"/>
-                </a:srgbClr>
-              </a:gs>
-              <a:gs pos="100000">
-                <a:srgbClr val="E8B23A">
-                  <a:alpha val="0"/>
-                </a:srgbClr>
-              </a:gs>
-            </a:gsLst>
-            <a:path path="circle">
-              <a:fillToRect l="50000" t="50000" r="50000" b="50000"/>
-            </a:path>
-          </a:gradFill>
-          <a:ln>
-            <a:noFill/>
-          </a:ln>
-          <a:effectLst/>
-        </p:spPr>
-        <p:style>
-          <a:lnRef idx="1">
-            <a:schemeClr val="accent1"/>
-          </a:lnRef>
-          <a:fillRef idx="3">
-            <a:schemeClr val="accent1"/>
-          </a:fillRef>
-          <a:effectRef idx="2">
-            <a:schemeClr val="accent1"/>
-          </a:effectRef>
-          <a:fontRef idx="minor">
-            <a:schemeClr val="lt1"/>
-          </a:fontRef>
-        </p:style>
-        <p:txBody>
-          <a:bodyPr rtlCol="0" anchor="ctr"/>
-          <a:lstStyle/>
-          <a:p>
-            <a:pPr algn="ctr"/>
-          </a:p>
-        </p:txBody>
-      </p:sp>
-      <p:sp>
-        <p:nvSpPr>
-          <p:cNvPr id="6" name="Oval 5"/>
-          <p:cNvSpPr/>
-          <p:nvPr/>
-        </p:nvSpPr>
-        <p:spPr>
-          <a:xfrm>
-            <a:off x="731519" y="91439"/>
-            <a:ext cx="7680960" cy="4937760"/>
-          </a:xfrm>
-          <a:prstGeom prst="ellipse">
-            <a:avLst/>
-          </a:prstGeom>
-          <a:gradFill>
-            <a:gsLst>
-              <a:gs pos="0">
-                <a:srgbClr val="E8B23A">
-                  <a:alpha val="10000"/>
-                </a:srgbClr>
-              </a:gs>
-              <a:gs pos="100000">
-                <a:srgbClr val="E8B23A">
-                  <a:alpha val="0"/>
-                </a:srgbClr>
-              </a:gs>
-            </a:gsLst>
-            <a:path path="circle">
-              <a:fillToRect l="50000" t="50000" r="50000" b="50000"/>
-            </a:path>
-          </a:gradFill>
-          <a:ln>
-            <a:noFill/>
-          </a:ln>
-          <a:effectLst/>
-        </p:spPr>
-        <p:style>
-          <a:lnRef idx="1">
-            <a:schemeClr val="accent1"/>
-          </a:lnRef>
-          <a:fillRef idx="3">
-            <a:schemeClr val="accent1"/>
-          </a:fillRef>
-          <a:effectRef idx="2">
-            <a:schemeClr val="accent1"/>
-          </a:effectRef>
-          <a:fontRef idx="minor">
-            <a:schemeClr val="lt1"/>
-          </a:fontRef>
-        </p:style>
-        <p:txBody>
-          <a:bodyPr rtlCol="0" anchor="ctr"/>
-          <a:lstStyle/>
-          <a:p>
-            <a:pPr algn="ctr"/>
-          </a:p>
-        </p:txBody>
-      </p:sp>
-      <p:sp>
-        <p:nvSpPr>
-          <p:cNvPr id="7" name="Oval 6"/>
-          <p:cNvSpPr/>
-          <p:nvPr/>
-        </p:nvSpPr>
-        <p:spPr>
-          <a:xfrm>
-            <a:off x="1645919" y="3749039"/>
-            <a:ext cx="5852160" cy="1371600"/>
-          </a:xfrm>
-          <a:prstGeom prst="ellipse">
-            <a:avLst/>
-          </a:prstGeom>
-          <a:gradFill>
-            <a:gsLst>
-              <a:gs pos="0">
-                <a:srgbClr val="E8B23A">
-                  <a:alpha val="20000"/>
-                </a:srgbClr>
-              </a:gs>
-              <a:gs pos="100000">
-                <a:srgbClr val="E8B23A">
-                  <a:alpha val="0"/>
-                </a:srgbClr>
-              </a:gs>
-            </a:gsLst>
-            <a:path path="circle">
-              <a:fillToRect l="50000" t="50000" r="50000" b="50000"/>
-            </a:path>
-          </a:gradFill>
-          <a:ln>
-            <a:noFill/>
-          </a:ln>
-          <a:effectLst/>
-        </p:spPr>
-        <p:style>
-          <a:lnRef idx="1">
-            <a:schemeClr val="accent1"/>
-          </a:lnRef>
-          <a:fillRef idx="3">
-            <a:schemeClr val="accent1"/>
-          </a:fillRef>
-          <a:effectRef idx="2">
-            <a:schemeClr val="accent1"/>
-          </a:effectRef>
-          <a:fontRef idx="minor">
-            <a:schemeClr val="lt1"/>
-          </a:fontRef>
-        </p:style>
-        <p:txBody>
-          <a:bodyPr rtlCol="0" anchor="ctr"/>
-          <a:lstStyle/>
-          <a:p>
-            <a:pPr algn="ctr"/>
-          </a:p>
-        </p:txBody>
-      </p:sp>
-      <p:sp>
-        <p:nvSpPr>
-          <p:cNvPr id="8" name="TextBox 7"/>
+          <p:cNvPr id="5" name="TextBox 4"/>
           <p:cNvSpPr txBox="1"/>
           <p:nvPr/>
         </p:nvSpPr>
         <p:spPr>
           <a:xfrm>
-            <a:off x="640080" y="960120"/>
-            <a:ext cx="7863840" cy="274320"/>
+            <a:off x="640080" y="1371600"/>
+            <a:ext cx="4572000" cy="274320"/>
           </a:xfrm>
           <a:prstGeom prst="rect">
             <a:avLst/>
@@ -14579,7 +13973,7 @@
           </a:bodyPr>
           <a:lstStyle/>
           <a:p>
-            <a:pPr algn="ctr">
+            <a:pPr algn="l">
               <a:lnSpc>
                 <a:spcPct val="112000"/>
               </a:lnSpc>
@@ -14596,7 +13990,7 @@
                   <a:srgbClr val="E8B23A"/>
                 </a:solidFill>
                 <a:latin typeface="Helvetica Neue"/>
-                <a:ea typeface="PingFang SC"/>
+                <a:ea typeface="Hiragino Sans GB"/>
               </a:rPr>
               <a:t>1 9 8 3 年 5 月 1 6 日   ·   M O T O W N   2 5</a:t>
             </a:r>
@@ -14605,14 +13999,14 @@
       </p:sp>
       <p:sp>
         <p:nvSpPr>
-          <p:cNvPr id="9" name="TextBox 8"/>
+          <p:cNvPr id="6" name="TextBox 5"/>
           <p:cNvSpPr txBox="1"/>
           <p:nvPr/>
         </p:nvSpPr>
         <p:spPr>
           <a:xfrm>
-            <a:off x="640080" y="1600200"/>
-            <a:ext cx="7863840" cy="1371600"/>
+            <a:off x="640080" y="1847088"/>
+            <a:ext cx="4572000" cy="1234440"/>
           </a:xfrm>
           <a:prstGeom prst="rect">
             <a:avLst/>
@@ -14626,7 +14020,7 @@
           </a:bodyPr>
           <a:lstStyle/>
           <a:p>
-            <a:pPr algn="ctr">
+            <a:pPr algn="l">
               <a:lnSpc>
                 <a:spcPct val="102000"/>
               </a:lnSpc>
@@ -14638,18 +14032,18 @@
               </a:spcAft>
             </a:pPr>
             <a:r>
-              <a:rPr sz="4000" b="0" i="0">
-                <a:solidFill>
-                  <a:srgbClr val="F3EFE6"/>
+              <a:rPr sz="4600" b="0" i="0">
+                <a:solidFill>
+                  <a:srgbClr val="E8B23A"/>
                 </a:solidFill>
                 <a:latin typeface="Didot"/>
-                <a:ea typeface="PingFang SC"/>
+                <a:ea typeface="Hiragino Sans GB"/>
               </a:rPr>
-              <a:t>那一夜，</a:t>
-            </a:r>
-          </a:p>
-          <a:p>
-            <a:pPr algn="ctr">
+              <a:t>太空步</a:t>
+            </a:r>
+          </a:p>
+          <a:p>
+            <a:pPr algn="l">
               <a:lnSpc>
                 <a:spcPct val="102000"/>
               </a:lnSpc>
@@ -14661,38 +14055,28 @@
               </a:spcAft>
             </a:pPr>
             <a:r>
-              <a:rPr sz="4600" b="0" i="1">
-                <a:solidFill>
-                  <a:srgbClr val="E8B23A"/>
+              <a:rPr sz="4000" b="0" i="0">
+                <a:solidFill>
+                  <a:srgbClr val="F3EFE6"/>
                 </a:solidFill>
                 <a:latin typeface="Didot"/>
-                <a:ea typeface="PingFang SC"/>
+                <a:ea typeface="Hiragino Sans GB"/>
               </a:rPr>
-              <a:t>太空步</a:t>
-            </a:r>
-            <a:r>
-              <a:rPr sz="4000" b="0" i="0">
-                <a:solidFill>
-                  <a:srgbClr val="F3EFE6"/>
-                </a:solidFill>
-                <a:latin typeface="Didot"/>
-                <a:ea typeface="PingFang SC"/>
-              </a:rPr>
-              <a:t>  惊艳登场</a:t>
-            </a:r>
-          </a:p>
-        </p:txBody>
-      </p:sp>
-      <p:sp>
-        <p:nvSpPr>
-          <p:cNvPr id="10" name="TextBox 9"/>
+              <a:t>登场的那一夜</a:t>
+            </a:r>
+          </a:p>
+        </p:txBody>
+      </p:sp>
+      <p:sp>
+        <p:nvSpPr>
+          <p:cNvPr id="7" name="TextBox 6"/>
           <p:cNvSpPr txBox="1"/>
           <p:nvPr/>
         </p:nvSpPr>
         <p:spPr>
           <a:xfrm>
-            <a:off x="1554480" y="3977639"/>
-            <a:ext cx="6035040" cy="822960"/>
+            <a:off x="640080" y="3675887"/>
+            <a:ext cx="4572000" cy="1280160"/>
           </a:xfrm>
           <a:prstGeom prst="rect">
             <a:avLst/>
@@ -14706,7 +14090,7 @@
           </a:bodyPr>
           <a:lstStyle/>
           <a:p>
-            <a:pPr algn="ctr">
+            <a:pPr algn="l">
               <a:lnSpc>
                 <a:spcPct val="130000"/>
               </a:lnSpc>
@@ -14723,9 +14107,9 @@
                   <a:srgbClr val="CBC5D2"/>
                 </a:solidFill>
                 <a:latin typeface="Helvetica Neue"/>
-                <a:ea typeface="PingFang SC"/>
+                <a:ea typeface="Hiragino Sans GB"/>
               </a:rPr>
-              <a:t>在 NBC《Motown 25》特别节目上表演《Billie Jean》时，杰克逊向后滑过整个舞台，首次亮出了那个日后定义了他的动作。约 4700 万观众收看 —— 《Thriller》也随之再攀新高。</a:t>
+              <a:t>在 NBC 播出的 Motown 25 周年特别节目上，杰克逊表演《Billie Jean》时向后滑过舞台，首次亮出了那个日后定义他的动作。约 4700 万观众目睹了这一幕 —— 《Thriller》也随之再攀新高。</a:t>
             </a:r>
           </a:p>
         </p:txBody>
@@ -14832,9 +14216,9 @@
                   <a:srgbClr val="E8B23A"/>
                 </a:solidFill>
                 <a:latin typeface="Helvetica Neue"/>
-                <a:ea typeface="PingFang SC"/>
+                <a:ea typeface="Hiragino Sans GB"/>
               </a:rPr>
-              <a:t>1983 年 12 月 · 短片</a:t>
+              <a:t>1983 年 12 月 · 那部短片</a:t>
             </a:r>
           </a:p>
         </p:txBody>
@@ -14879,7 +14263,7 @@
                   <a:srgbClr val="F3EFE6"/>
                 </a:solidFill>
                 <a:latin typeface="Didot"/>
-                <a:ea typeface="PingFang SC"/>
+                <a:ea typeface="Hiragino Sans GB"/>
               </a:rPr>
               <a:t>他把音乐录影带拍成了电影</a:t>
             </a:r>
@@ -14970,7 +14354,7 @@
                   <a:srgbClr val="E8B23A"/>
                 </a:solidFill>
                 <a:latin typeface="Didot"/>
-                <a:ea typeface="PingFang SC"/>
+                <a:ea typeface="Hiragino Sans GB"/>
               </a:rPr>
               <a:t>MJ</a:t>
             </a:r>
@@ -15017,9 +14401,9 @@
                   <a:srgbClr val="CBC5D2"/>
                 </a:solidFill>
                 <a:latin typeface="Helvetica Neue"/>
-                <a:ea typeface="PingFang SC"/>
+                <a:ea typeface="Hiragino Sans GB"/>
               </a:rPr>
-              <a:t>由 John Landis 执导、长达 14 分钟的恐怖短片 ——《Thriller》MV 把一支流行单曲当成电影来拍：有故事、有预算、有特效化妆，还有让人一看再看的编舞。它让 MTV 成了非看不可的频道。</a:t>
+              <a:t>由约翰·兰迪斯执导、长达 14 分钟的恐怖短片，《Thriller》的录影带把一支流行单曲当电影来拍 —— 有剧情、有预算、有特效化妆，还有让人一遍遍回看的编舞。它让 MTV 成了非看不可的频道。</a:t>
             </a:r>
           </a:p>
         </p:txBody>
@@ -15988,9 +15372,9 @@
                   <a:srgbClr val="E8B23A"/>
                 </a:solidFill>
                 <a:latin typeface="Helvetica Neue"/>
-                <a:ea typeface="PingFang SC"/>
+                <a:ea typeface="Hiragino Sans GB"/>
               </a:rPr>
-              <a:t>故事</a:t>
+              <a:t>剧情</a:t>
             </a:r>
           </a:p>
         </p:txBody>
@@ -16083,7 +15467,7 @@
                   <a:srgbClr val="E8B23A"/>
                 </a:solidFill>
                 <a:latin typeface="Helvetica Neue"/>
-                <a:ea typeface="PingFang SC"/>
+                <a:ea typeface="Hiragino Sans GB"/>
               </a:rPr>
               <a:t>恐怖</a:t>
             </a:r>
@@ -16178,7 +15562,7 @@
                   <a:srgbClr val="E8B23A"/>
                 </a:solidFill>
                 <a:latin typeface="Helvetica Neue"/>
-                <a:ea typeface="PingFang SC"/>
+                <a:ea typeface="Hiragino Sans GB"/>
               </a:rPr>
               <a:t>舞蹈</a:t>
             </a:r>
@@ -16273,7 +15657,7 @@
                   <a:srgbClr val="E8B23A"/>
                 </a:solidFill>
                 <a:latin typeface="Helvetica Neue"/>
-                <a:ea typeface="PingFang SC"/>
+                <a:ea typeface="Hiragino Sans GB"/>
               </a:rPr>
               <a:t>14 分钟</a:t>
             </a:r>
@@ -16320,7 +15704,7 @@
                   <a:srgbClr val="E8B23A"/>
                 </a:solidFill>
                 <a:latin typeface="Helvetica Neue"/>
-                <a:ea typeface="PingFang SC"/>
+                <a:ea typeface="Hiragino Sans GB"/>
               </a:rPr>
               <a:t>14 分钟</a:t>
             </a:r>
@@ -16367,9 +15751,9 @@
                   <a:srgbClr val="958EA0"/>
                 </a:solidFill>
                 <a:latin typeface="Helvetica Neue"/>
-                <a:ea typeface="PingFang SC"/>
+                <a:ea typeface="Hiragino Sans GB"/>
               </a:rPr>
-              <a:t>时长</a:t>
+              <a:t>片长</a:t>
             </a:r>
           </a:p>
         </p:txBody>
@@ -16399,7 +15783,7 @@
           <a:p>
             <a:pPr algn="l">
               <a:lnSpc>
-                <a:spcPct val="100000"/>
+                <a:spcPct val="112000"/>
               </a:lnSpc>
               <a:spcBef>
                 <a:spcPts val="0"/>
@@ -16414,9 +15798,9 @@
                   <a:srgbClr val="E8B23A"/>
                 </a:solidFill>
                 <a:latin typeface="Helvetica Neue"/>
-                <a:ea typeface="PingFang SC"/>
+                <a:ea typeface="Hiragino Sans GB"/>
               </a:rPr>
-              <a:t>John Landis</a:t>
+              <a:t>约翰·兰迪斯</a:t>
             </a:r>
           </a:p>
         </p:txBody>
@@ -16461,7 +15845,7 @@
                   <a:srgbClr val="958EA0"/>
                 </a:solidFill>
                 <a:latin typeface="Helvetica Neue"/>
-                <a:ea typeface="PingFang SC"/>
+                <a:ea typeface="Hiragino Sans GB"/>
               </a:rPr>
               <a:t>导演</a:t>
             </a:r>
@@ -16508,7 +15892,7 @@
                   <a:srgbClr val="E8B23A"/>
                 </a:solidFill>
                 <a:latin typeface="Helvetica Neue"/>
-                <a:ea typeface="PingFang SC"/>
+                <a:ea typeface="Hiragino Sans GB"/>
               </a:rPr>
               <a:t>史上首支</a:t>
             </a:r>
@@ -16555,9 +15939,9 @@
                   <a:srgbClr val="958EA0"/>
                 </a:solidFill>
                 <a:latin typeface="Helvetica Neue"/>
-                <a:ea typeface="PingFang SC"/>
+                <a:ea typeface="Hiragino Sans GB"/>
               </a:rPr>
-              <a:t>入选美国国家电影登记处的 MV</a:t>
+              <a:t>入选美国国家电影登记处的音乐录影带</a:t>
             </a:r>
           </a:p>
         </p:txBody>
@@ -16646,9 +16030,9 @@
                   <a:srgbClr val="E8B23A"/>
                 </a:solidFill>
                 <a:latin typeface="Helvetica Neue"/>
-                <a:ea typeface="PingFang SC"/>
+                <a:ea typeface="Hiragino Sans GB"/>
               </a:rPr>
-              <a:t>MICHAEL JACKSON</a:t>
+              <a:t>迈克尔·杰克逊</a:t>
             </a:r>
             <a:r>
               <a:rPr sz="850" b="0" i="0">
@@ -16656,9 +16040,9 @@
                   <a:srgbClr val="958EA0"/>
                 </a:solidFill>
                 <a:latin typeface="Helvetica Neue"/>
-                <a:ea typeface="PingFang SC"/>
+                <a:ea typeface="Hiragino Sans GB"/>
               </a:rPr>
-              <a:t>   ·   流行乐之王</a:t>
+              <a:t>   ·   流行音乐之王</a:t>
             </a:r>
           </a:p>
         </p:txBody>
@@ -16703,7 +16087,7 @@
                   <a:srgbClr val="958EA0"/>
                 </a:solidFill>
                 <a:latin typeface="Helvetica Neue"/>
-                <a:ea typeface="PingFang SC"/>
+                <a:ea typeface="Hiragino Sans GB"/>
               </a:rPr>
               <a:t>07 / 14</a:t>
             </a:r>
@@ -16812,7 +16196,7 @@
                   <a:srgbClr val="E8B23A"/>
                 </a:solidFill>
                 <a:latin typeface="Helvetica Neue"/>
-                <a:ea typeface="PingFang SC"/>
+                <a:ea typeface="Hiragino Sans GB"/>
               </a:rPr>
               <a:t>1979–2001 · 个人专辑全集</a:t>
             </a:r>
@@ -16859,7 +16243,7 @@
                   <a:srgbClr val="F3EFE6"/>
                 </a:solidFill>
                 <a:latin typeface="Didot"/>
-                <a:ea typeface="PingFang SC"/>
+                <a:ea typeface="Hiragino Sans GB"/>
               </a:rPr>
               <a:t>六张专辑，挪动了流行乐的重心</a:t>
             </a:r>
@@ -16950,7 +16334,7 @@
                   <a:srgbClr val="E8B23A"/>
                 </a:solidFill>
                 <a:latin typeface="Didot"/>
-                <a:ea typeface="PingFang SC"/>
+                <a:ea typeface="Hiragino Sans GB"/>
               </a:rPr>
               <a:t>MJ</a:t>
             </a:r>
@@ -16997,9 +16381,9 @@
                   <a:srgbClr val="CBC5D2"/>
                 </a:solidFill>
                 <a:latin typeface="Helvetica Neue"/>
-                <a:ea typeface="PingFang SC"/>
+                <a:ea typeface="Hiragino Sans GB"/>
               </a:rPr>
-              <a:t>跨越三十年的六张录音室专辑 —— 从迪斯科流行到新杰克摇摆。</a:t>
+              <a:t>横跨三十年的六张录音室专辑 —— 从迪斯科流行到新杰克摇摆。</a:t>
             </a:r>
           </a:p>
         </p:txBody>
@@ -17134,7 +16518,7 @@
                   <a:srgbClr val="958EA0"/>
                 </a:solidFill>
                 <a:latin typeface="Helvetica Neue"/>
-                <a:ea typeface="PingFang SC"/>
+                <a:ea typeface="Hiragino Sans GB"/>
               </a:rPr>
               <a:t>1979</a:t>
             </a:r>
@@ -17181,7 +16565,7 @@
                   <a:srgbClr val="F3EFE6"/>
                 </a:solidFill>
                 <a:latin typeface="Helvetica Neue"/>
-                <a:ea typeface="PingFang SC"/>
+                <a:ea typeface="Hiragino Sans GB"/>
               </a:rPr>
               <a:t>Off the Wall</a:t>
             </a:r>
@@ -17228,7 +16612,7 @@
                   <a:srgbClr val="958EA0"/>
                 </a:solidFill>
                 <a:latin typeface="Helvetica Neue"/>
-                <a:ea typeface="PingFang SC"/>
+                <a:ea typeface="Hiragino Sans GB"/>
               </a:rPr>
               <a:t>突破</a:t>
             </a:r>
@@ -17321,7 +16705,7 @@
                   <a:srgbClr val="958EA0"/>
                 </a:solidFill>
                 <a:latin typeface="Helvetica Neue"/>
-                <a:ea typeface="PingFang SC"/>
+                <a:ea typeface="Hiragino Sans GB"/>
               </a:rPr>
               <a:t>1982</a:t>
             </a:r>
@@ -17368,7 +16752,7 @@
                   <a:srgbClr val="F3EFE6"/>
                 </a:solidFill>
                 <a:latin typeface="Helvetica Neue"/>
-                <a:ea typeface="PingFang SC"/>
+                <a:ea typeface="Hiragino Sans GB"/>
               </a:rPr>
               <a:t>Thriller</a:t>
             </a:r>
@@ -17415,7 +16799,7 @@
                   <a:srgbClr val="958EA0"/>
                 </a:solidFill>
                 <a:latin typeface="Helvetica Neue"/>
-                <a:ea typeface="PingFang SC"/>
+                <a:ea typeface="Hiragino Sans GB"/>
               </a:rPr>
               <a:t>最畅销</a:t>
             </a:r>
@@ -17508,7 +16892,7 @@
                   <a:srgbClr val="E8B23A"/>
                 </a:solidFill>
                 <a:latin typeface="Helvetica Neue"/>
-                <a:ea typeface="PingFang SC"/>
+                <a:ea typeface="Hiragino Sans GB"/>
               </a:rPr>
               <a:t>1987</a:t>
             </a:r>
@@ -17555,7 +16939,7 @@
                   <a:srgbClr val="F3EFE6"/>
                 </a:solidFill>
                 <a:latin typeface="Helvetica Neue"/>
-                <a:ea typeface="PingFang SC"/>
+                <a:ea typeface="Hiragino Sans GB"/>
               </a:rPr>
               <a:t>Bad</a:t>
             </a:r>
@@ -17602,7 +16986,7 @@
                   <a:srgbClr val="958EA0"/>
                 </a:solidFill>
                 <a:latin typeface="Helvetica Neue"/>
-                <a:ea typeface="PingFang SC"/>
+                <a:ea typeface="Hiragino Sans GB"/>
               </a:rPr>
               <a:t>五支冠军单曲</a:t>
             </a:r>
@@ -17695,7 +17079,7 @@
                   <a:srgbClr val="958EA0"/>
                 </a:solidFill>
                 <a:latin typeface="Helvetica Neue"/>
-                <a:ea typeface="PingFang SC"/>
+                <a:ea typeface="Hiragino Sans GB"/>
               </a:rPr>
               <a:t>1991</a:t>
             </a:r>
@@ -17742,7 +17126,7 @@
                   <a:srgbClr val="F3EFE6"/>
                 </a:solidFill>
                 <a:latin typeface="Helvetica Neue"/>
-                <a:ea typeface="PingFang SC"/>
+                <a:ea typeface="Hiragino Sans GB"/>
               </a:rPr>
               <a:t>Dangerous</a:t>
             </a:r>
@@ -17789,7 +17173,7 @@
                   <a:srgbClr val="958EA0"/>
                 </a:solidFill>
                 <a:latin typeface="Helvetica Neue"/>
-                <a:ea typeface="PingFang SC"/>
+                <a:ea typeface="Hiragino Sans GB"/>
               </a:rPr>
               <a:t>新杰克摇摆</a:t>
             </a:r>
@@ -17882,7 +17266,7 @@
                   <a:srgbClr val="958EA0"/>
                 </a:solidFill>
                 <a:latin typeface="Helvetica Neue"/>
-                <a:ea typeface="PingFang SC"/>
+                <a:ea typeface="Hiragino Sans GB"/>
               </a:rPr>
               <a:t>1995</a:t>
             </a:r>
@@ -17929,7 +17313,7 @@
                   <a:srgbClr val="F3EFE6"/>
                 </a:solidFill>
                 <a:latin typeface="Helvetica Neue"/>
-                <a:ea typeface="PingFang SC"/>
+                <a:ea typeface="Hiragino Sans GB"/>
               </a:rPr>
               <a:t>HIStory</a:t>
             </a:r>
@@ -17976,9 +17360,9 @@
                   <a:srgbClr val="958EA0"/>
                 </a:solidFill>
                 <a:latin typeface="Helvetica Neue"/>
-                <a:ea typeface="PingFang SC"/>
+                <a:ea typeface="Hiragino Sans GB"/>
               </a:rPr>
-              <a:t>精选 + 新作</a:t>
+              <a:t>精选加新作</a:t>
             </a:r>
           </a:p>
         </p:txBody>
@@ -18069,7 +17453,7 @@
                   <a:srgbClr val="958EA0"/>
                 </a:solidFill>
                 <a:latin typeface="Helvetica Neue"/>
-                <a:ea typeface="PingFang SC"/>
+                <a:ea typeface="Hiragino Sans GB"/>
               </a:rPr>
               <a:t>2001</a:t>
             </a:r>
@@ -18116,7 +17500,7 @@
                   <a:srgbClr val="F3EFE6"/>
                 </a:solidFill>
                 <a:latin typeface="Helvetica Neue"/>
-                <a:ea typeface="PingFang SC"/>
+                <a:ea typeface="Hiragino Sans GB"/>
               </a:rPr>
               <a:t>Invincible</a:t>
             </a:r>
@@ -18163,9 +17547,9 @@
                   <a:srgbClr val="958EA0"/>
                 </a:solidFill>
                 <a:latin typeface="Helvetica Neue"/>
-                <a:ea typeface="PingFang SC"/>
+                <a:ea typeface="Hiragino Sans GB"/>
               </a:rPr>
-              <a:t>最后一张录音室专辑</a:t>
+              <a:t>收官之作</a:t>
             </a:r>
           </a:p>
         </p:txBody>
@@ -18268,7 +17652,7 @@
                   <a:srgbClr val="E8B23A"/>
                 </a:solidFill>
                 <a:latin typeface="Helvetica Neue"/>
-                <a:ea typeface="PingFang SC"/>
+                <a:ea typeface="Hiragino Sans GB"/>
               </a:rPr>
               <a:t>Bad</a:t>
             </a:r>
@@ -18278,9 +17662,9 @@
                   <a:srgbClr val="F3EFE6"/>
                 </a:solidFill>
                 <a:latin typeface="Helvetica Neue"/>
-                <a:ea typeface="PingFang SC"/>
+                <a:ea typeface="Hiragino Sans GB"/>
               </a:rPr>
-              <a:t>（1987）成为史上首张将五支单曲送上 Billboard Hot 100 冠军的专辑。</a:t>
+              <a:t>（1987）是史上首张把五支单曲送上 Billboard Hot 100 冠军的专辑。</a:t>
             </a:r>
           </a:p>
         </p:txBody>
@@ -18369,9 +17753,9 @@
                   <a:srgbClr val="E8B23A"/>
                 </a:solidFill>
                 <a:latin typeface="Helvetica Neue"/>
-                <a:ea typeface="PingFang SC"/>
+                <a:ea typeface="Hiragino Sans GB"/>
               </a:rPr>
-              <a:t>MICHAEL JACKSON</a:t>
+              <a:t>迈克尔·杰克逊</a:t>
             </a:r>
             <a:r>
               <a:rPr sz="850" b="0" i="0">
@@ -18379,9 +17763,9 @@
                   <a:srgbClr val="958EA0"/>
                 </a:solidFill>
                 <a:latin typeface="Helvetica Neue"/>
-                <a:ea typeface="PingFang SC"/>
+                <a:ea typeface="Hiragino Sans GB"/>
               </a:rPr>
-              <a:t>   ·   流行乐之王</a:t>
+              <a:t>   ·   流行音乐之王</a:t>
             </a:r>
           </a:p>
         </p:txBody>
@@ -18426,7 +17810,7 @@
                   <a:srgbClr val="958EA0"/>
                 </a:solidFill>
                 <a:latin typeface="Helvetica Neue"/>
-                <a:ea typeface="PingFang SC"/>
+                <a:ea typeface="Hiragino Sans GB"/>
               </a:rPr>
               <a:t>08 / 14</a:t>
             </a:r>
@@ -18535,9 +17919,9 @@
                   <a:srgbClr val="E8B23A"/>
                 </a:solidFill>
                 <a:latin typeface="Helvetica Neue"/>
-                <a:ea typeface="PingFang SC"/>
+                <a:ea typeface="Hiragino Sans GB"/>
               </a:rPr>
-              <a:t>1993 年 1 月 31 日 · SUPER BOWL XXVII</a:t>
+              <a:t>1993 年 1 月 31 日 · 超级碗 XXVII</a:t>
             </a:r>
           </a:p>
         </p:txBody>
@@ -18582,9 +17966,9 @@
                   <a:srgbClr val="F3EFE6"/>
                 </a:solidFill>
                 <a:latin typeface="Didot"/>
-                <a:ea typeface="PingFang SC"/>
+                <a:ea typeface="Hiragino Sans GB"/>
               </a:rPr>
-              <a:t>他把中场秀变成了正场大戏</a:t>
+              <a:t>他让中场秀成了正戏</a:t>
             </a:r>
           </a:p>
         </p:txBody>
@@ -18673,7 +18057,7 @@
                   <a:srgbClr val="E8B23A"/>
                 </a:solidFill>
                 <a:latin typeface="Didot"/>
-                <a:ea typeface="PingFang SC"/>
+                <a:ea typeface="Hiragino Sans GB"/>
               </a:rPr>
               <a:t>MJ</a:t>
             </a:r>
@@ -19886,9 +19270,9 @@
                   <a:srgbClr val="CBC5D2"/>
                 </a:solidFill>
                 <a:latin typeface="Helvetica Neue"/>
-                <a:ea typeface="PingFang SC"/>
+                <a:ea typeface="Hiragino Sans GB"/>
               </a:rPr>
-              <a:t>在迈克尔·杰克逊之前，观众会趁中场换台。他坐满了玫瑰碗球场，开场时纹丝不动地站了近两分钟，随后牢牢抓住全场 —— 也抓住了收视率 —— 直到演出结束。</a:t>
+              <a:t>在迈克尔·杰克逊之前，观众一到中场就换台。他站满整座玫瑰碗体育场，开场先一动不动地站了近两分钟，然后把全场 —— 连同收视率 —— 牢牢攥在手里，直到演出结束。</a:t>
             </a:r>
           </a:p>
         </p:txBody>
@@ -19986,12 +19370,12 @@
               </a:spcAft>
             </a:pPr>
             <a:r>
-              <a:rPr sz="1250" b="0" i="1">
+              <a:rPr sz="1250" b="0" i="0">
                 <a:solidFill>
                   <a:srgbClr val="F3EFE6"/>
                 </a:solidFill>
                 <a:latin typeface="Helvetica Neue"/>
-                <a:ea typeface="PingFang SC"/>
+                <a:ea typeface="Hiragino Sans GB"/>
               </a:rPr>
               <a:t>此后每一场重磅中场秀的蓝本。</a:t>
             </a:r>
@@ -20082,7 +19466,7 @@
                   <a:srgbClr val="E8B23A"/>
                 </a:solidFill>
                 <a:latin typeface="Helvetica Neue"/>
-                <a:ea typeface="PingFang SC"/>
+                <a:ea typeface="Hiragino Sans GB"/>
               </a:rPr>
               <a:t>133.4M</a:t>
             </a:r>
@@ -20129,7 +19513,7 @@
                   <a:srgbClr val="F3EFE6"/>
                 </a:solidFill>
                 <a:latin typeface="Helvetica Neue"/>
-                <a:ea typeface="PingFang SC"/>
+                <a:ea typeface="Hiragino Sans GB"/>
               </a:rPr>
               <a:t>美国观众</a:t>
             </a:r>
@@ -20176,9 +19560,9 @@
                   <a:srgbClr val="CBC5D2"/>
                 </a:solidFill>
                 <a:latin typeface="Helvetica Neue"/>
-                <a:ea typeface="PingFang SC"/>
+                <a:ea typeface="Hiragino Sans GB"/>
               </a:rPr>
-              <a:t>▲  史上首次超级碗的收视人数在中场之后不降反升</a:t>
+              <a:t>▲  超级碗史上首次，观众人数在下半场不减反增</a:t>
             </a:r>
           </a:p>
         </p:txBody>
@@ -20267,9 +19651,9 @@
                   <a:srgbClr val="E8B23A"/>
                 </a:solidFill>
                 <a:latin typeface="Helvetica Neue"/>
-                <a:ea typeface="PingFang SC"/>
+                <a:ea typeface="Hiragino Sans GB"/>
               </a:rPr>
-              <a:t>MICHAEL JACKSON</a:t>
+              <a:t>迈克尔·杰克逊</a:t>
             </a:r>
             <a:r>
               <a:rPr sz="850" b="0" i="0">
@@ -20277,9 +19661,9 @@
                   <a:srgbClr val="958EA0"/>
                 </a:solidFill>
                 <a:latin typeface="Helvetica Neue"/>
-                <a:ea typeface="PingFang SC"/>
+                <a:ea typeface="Hiragino Sans GB"/>
               </a:rPr>
-              <a:t>   ·   流行乐之王</a:t>
+              <a:t>   ·   流行音乐之王</a:t>
             </a:r>
           </a:p>
         </p:txBody>
@@ -20324,7 +19708,7 @@
                   <a:srgbClr val="958EA0"/>
                 </a:solidFill>
                 <a:latin typeface="Helvetica Neue"/>
-                <a:ea typeface="PingFang SC"/>
+                <a:ea typeface="Hiragino Sans GB"/>
               </a:rPr>
               <a:t>09 / 14</a:t>
             </a:r>

--- a/templates/decks/zh/michael-jackson-king-of-pop/template.pptx
+++ b/templates/decks/zh/michael-jackson-king-of-pop/template.pptx
@@ -6844,7 +6844,7 @@
               </a:spcAft>
             </a:pPr>
             <a:r>
-              <a:rPr sz="1250" b="0" i="0">
+              <a:rPr sz="1100" b="0" i="0">
                 <a:solidFill>
                   <a:srgbClr val="BFBBC6"/>
                 </a:solidFill>
@@ -13602,7 +13602,7 @@
               </a:spcAft>
             </a:pPr>
             <a:r>
-              <a:rPr sz="1200" b="0" i="0">
+              <a:rPr sz="1100" b="0" i="0">
                 <a:solidFill>
                   <a:srgbClr val="F3EFE6"/>
                 </a:solidFill>
@@ -13612,7 +13612,7 @@
               <a:t>一夜之内八座格莱美，创下当时纪录（1984 年 2 月 28 日）—— </a:t>
             </a:r>
             <a:r>
-              <a:rPr sz="1200" b="1" i="1">
+              <a:rPr sz="1100" b="1" i="1">
                 <a:solidFill>
                   <a:srgbClr val="E8B23A"/>
                 </a:solidFill>
@@ -13622,7 +13622,7 @@
               <a:t>Billie Jean</a:t>
             </a:r>
             <a:r>
-              <a:rPr sz="1200" b="0" i="0">
+              <a:rPr sz="1100" b="0" i="0">
                 <a:solidFill>
                   <a:srgbClr val="F3EFE6"/>
                 </a:solidFill>
@@ -13632,7 +13632,7 @@
               <a:t> 与 </a:t>
             </a:r>
             <a:r>
-              <a:rPr sz="1200" b="1" i="1">
+              <a:rPr sz="1100" b="1" i="1">
                 <a:solidFill>
                   <a:srgbClr val="E8B23A"/>
                 </a:solidFill>
@@ -13642,7 +13642,7 @@
               <a:t>Beat It</a:t>
             </a:r>
             <a:r>
-              <a:rPr sz="1200" b="0" i="0">
+              <a:rPr sz="1100" b="0" i="0">
                 <a:solidFill>
                   <a:srgbClr val="F3EFE6"/>
                 </a:solidFill>
